--- a/slides/pptx/week02.pptx
+++ b/slides/pptx/week02.pptx
@@ -4759,7 +4759,7 @@
                 <a:ea typeface="Calibri" pitchFamily="34" charset="-122"/>
                 <a:cs typeface="Calibri" pitchFamily="34" charset="-120"/>
               </a:rPr>
-              <a:t>Threat modeling finds *design* flaws</a:t>
+              <a:t>Threat modeling finds design flaws</a:t>
             </a:r>
             <a:endParaRPr lang="en-US" sz="1400" dirty="0"/>
           </a:p>
@@ -4780,7 +4780,7 @@
                 <a:ea typeface="Calibri" pitchFamily="34" charset="-122"/>
                 <a:cs typeface="Calibri" pitchFamily="34" charset="-120"/>
               </a:rPr>
-              <a:t>This week: find *implementation* flaws — automatically</a:t>
+              <a:t>This week: find implementation flaws — automatically</a:t>
             </a:r>
             <a:endParaRPr lang="en-US" sz="1400" dirty="0"/>
           </a:p>

--- a/slides/pptx/week02.pptx
+++ b/slides/pptx/week02.pptx
@@ -516,7 +516,7 @@
           <a:p>
             <a:r>
               <a:rPr lang="en-US" dirty="0"/>
-              <a:t/>
+              <a:t>Hook: open by running a scanner live on a flawed repo and let a finding pop up in seconds — "this is how the industry finds bugs at scale." Today = the tools + the mindset of catching bugs early. ~2 min.</a:t>
             </a:r>
             <a:endParaRPr lang="en-US" dirty="0"/>
           </a:p>
@@ -604,7 +604,7 @@
           <a:p>
             <a:r>
               <a:rPr lang="en-US" dirty="0"/>
-              <a:t/>
+              <a:t>Name the real tools they'll see in industry/internships. SonarQube = quality gate; GHAS = security native in GitHub. Connect "technical debt" to the cost curve from the recap. ~3 min.</a:t>
             </a:r>
             <a:endParaRPr lang="en-US" dirty="0"/>
           </a:p>
@@ -692,7 +692,7 @@
           <a:p>
             <a:r>
               <a:rPr lang="en-US" dirty="0"/>
-              <a:t/>
+              <a:t>Explain the game before lab: speed + accuracy. Penalize wild guessing (misclassified subtracts) so they must justify each finding. Mirrors a real bug-bounty triage queue. ~3 min.</a:t>
             </a:r>
             <a:endParaRPr lang="en-US" dirty="0"/>
           </a:p>
@@ -780,7 +780,7 @@
           <a:p>
             <a:r>
               <a:rPr lang="en-US" dirty="0"/>
-              <a:t/>
+              <a:t>Quick, fun, instant feedback (it crashes or it doesn't). Sets up W11. If short on time, make this a demo. ~2 min.</a:t>
             </a:r>
             <a:endParaRPr lang="en-US" dirty="0"/>
           </a:p>
@@ -868,7 +868,7 @@
           <a:p>
             <a:r>
               <a:rPr lang="en-US" dirty="0"/>
-              <a:t/>
+              <a:t>The graded output. Remind them to also scan the NoteVault project target (worksheet task) and to do the AI-resilient tasks. Point to scan.sh.</a:t>
             </a:r>
             <a:endParaRPr lang="en-US" dirty="0"/>
           </a:p>
@@ -956,7 +956,7 @@
           <a:p>
             <a:r>
               <a:rPr lang="en-US" dirty="0"/>
-              <a:t/>
+              <a:t>Recap, 3 lines. Cold-call: "name a bug SAST would miss but DAST would catch." ~2 min.</a:t>
             </a:r>
             <a:endParaRPr lang="en-US" dirty="0"/>
           </a:p>
@@ -1044,7 +1044,7 @@
           <a:p>
             <a:r>
               <a:rPr lang="en-US" dirty="0"/>
-              <a:t/>
+              <a:t>Cliffhanger: "Next week we break crypto — crack passwords and decrypt a secret in minutes." Remind: scanners ready in their VM.</a:t>
             </a:r>
             <a:endParaRPr lang="en-US" dirty="0"/>
           </a:p>
@@ -1132,7 +1132,7 @@
           <a:p>
             <a:r>
               <a:rPr lang="en-US" dirty="0"/>
-              <a:t/>
+              <a:t>Roadmap, 1 min. Flag the lab: scan a deliberately flawed repo, triage by CWE, then fix. Bonus: first team to crash a target with a fuzzer.</a:t>
             </a:r>
             <a:endParaRPr lang="en-US" dirty="0"/>
           </a:p>
@@ -1220,7 +1220,7 @@
           <a:p>
             <a:r>
               <a:rPr lang="en-US" dirty="0"/>
-              <a:t/>
+              <a:t>Bridge from W1. W1 = think (design). W2 = automate (code). Remind the cost curve: a bug caught in CI costs ~1×, in production ~100×. ~2 min.</a:t>
             </a:r>
             <a:endParaRPr lang="en-US" dirty="0"/>
           </a:p>
@@ -1308,7 +1308,7 @@
           <a:p>
             <a:r>
               <a:rPr lang="en-US" dirty="0"/>
-              <a:t/>
+              <a:t>Walk the phases on the board; ask "where can security live?" (answer: every phase). Threat modeling = design; SAST/secret scan = code/commit; DAST = test; monitoring = operate. "Shift left" = move detection earlier. ~5 min.</a:t>
             </a:r>
             <a:endParaRPr lang="en-US" dirty="0"/>
           </a:p>
@@ -1396,7 +1396,7 @@
           <a:p>
             <a:r>
               <a:rPr lang="en-US" dirty="0"/>
-              <a:t/>
+              <a:t>The mental map for the whole unit. Stress: no single tool finds everything — they see different things. Tie each to a later week (SCA → W12, DAST → Burp in W4-6). ~5 min.</a:t>
             </a:r>
             <a:endParaRPr lang="en-US" dirty="0"/>
           </a:p>
@@ -1484,7 +1484,7 @@
           <a:p>
             <a:r>
               <a:rPr lang="en-US" dirty="0"/>
-              <a:t/>
+              <a:t>The classic comparison students confuse. Analogy: SAST = proofreading the recipe; DAST = tasting the cooked dish. SAST sees a hardcoded secret DAST never will; DAST sees an auth bypass SAST can't. ~4 min.</a:t>
             </a:r>
             <a:endParaRPr lang="en-US" dirty="0"/>
           </a:p>
@@ -1572,7 +1572,7 @@
           <a:p>
             <a:r>
               <a:rPr lang="en-US" dirty="0"/>
-              <a:t/>
+              <a:t>The make-it-concrete slide — point at the exact lines each tool fires on. This is the `vulnerable-repo/app.py` they'll scan in the lab. Ask: "which tool finds the secret? which finds the SQLi? could one tool find both?" ~6 min.</a:t>
             </a:r>
             <a:endParaRPr lang="en-US" dirty="0"/>
           </a:p>
@@ -1660,7 +1660,7 @@
           <a:p>
             <a:r>
               <a:rPr lang="en-US" dirty="0"/>
-              <a:t/>
+              <a:t>Fuzzing is the highest-yield bug finder in industry (most memory CVEs come from it). Explain coverage-guided = the fuzzer "learns" inputs that reach new code. Deep dive + exploit comes in W11. ~5 min.</a:t>
             </a:r>
             <a:endParaRPr lang="en-US" dirty="0"/>
           </a:p>
@@ -1748,7 +1748,7 @@
           <a:p>
             <a:r>
               <a:rPr lang="en-US" dirty="0"/>
-              <a:t/>
+              <a:t>Crucial professional skill: a scanner that cries wolf gets ignored. Show a likely false positive vs a real one. Teach: every finding gets a CWE + a TP/FP call + a one-line justification. ~4 min.</a:t>
             </a:r>
             <a:endParaRPr lang="en-US" dirty="0"/>
           </a:p>
@@ -2410,7 +2410,7 @@
                 <a:ea typeface="Arial" pitchFamily="34" charset="-122"/>
                 <a:cs typeface="Arial" pitchFamily="34" charset="-120"/>
               </a:rPr>
-              <a:t>Triage: not every finding is a bug</a:t>
+              <a:t>Tools you'll meet</a:t>
             </a:r>
             <a:endParaRPr lang="en-US" sz="2600" dirty="0"/>
           </a:p>
@@ -2425,11 +2425,11 @@
         <p:spPr>
           <a:xfrm>
             <a:off x="457200" y="1325880"/>
-            <a:ext cx="8229600" cy="1517904"/>
+            <a:ext cx="8229600" cy="1207008"/>
           </a:xfrm>
           <a:prstGeom prst="roundRect">
             <a:avLst>
-              <a:gd name="adj" fmla="val 4819"/>
+              <a:gd name="adj" fmla="val 6061"/>
             </a:avLst>
           </a:prstGeom>
           <a:solidFill>
@@ -2454,7 +2454,7 @@
         <p:spPr>
           <a:xfrm>
             <a:off x="731520" y="1435608"/>
-            <a:ext cx="7680960" cy="1298448"/>
+            <a:ext cx="7680960" cy="987552"/>
           </a:xfrm>
           <a:prstGeom prst="rect">
             <a:avLst/>
@@ -2482,7 +2482,7 @@
                 <a:ea typeface="Calibri" pitchFamily="34" charset="-122"/>
                 <a:cs typeface="Calibri" pitchFamily="34" charset="-120"/>
               </a:rPr>
-              <a:t>True positive vs false positive</a:t>
+              <a:t>SonarQube — code quality + SAST against the "7 axes" (bugs, duplication, complexity, coverage…)</a:t>
             </a:r>
             <a:endParaRPr lang="en-US" sz="1400" dirty="0"/>
           </a:p>
@@ -2503,7 +2503,7 @@
                 <a:ea typeface="Calibri" pitchFamily="34" charset="-122"/>
                 <a:cs typeface="Calibri" pitchFamily="34" charset="-120"/>
               </a:rPr>
-              <a:t>Map each to a CWE + severity</a:t>
+              <a:t>GitHub Advanced Security (GHAS) — CodeQL + secret scanning + Dependabot, native in the repo</a:t>
             </a:r>
             <a:endParaRPr lang="en-US" sz="1400" dirty="0"/>
           </a:p>
@@ -2524,28 +2524,7 @@
                 <a:ea typeface="Calibri" pitchFamily="34" charset="-122"/>
                 <a:cs typeface="Calibri" pitchFamily="34" charset="-120"/>
               </a:rPr>
-              <a:t>Prioritize by exploitability × impact</a:t>
-            </a:r>
-            <a:endParaRPr lang="en-US" sz="1400" dirty="0"/>
-          </a:p>
-          <a:p>
-            <a:pPr marL="342900" indent="-342900">
-              <a:spcAft>
-                <a:spcPts val="600"/>
-              </a:spcAft>
-              <a:buSzPct val="100000"/>
-              <a:buChar char="•"/>
-            </a:pPr>
-            <a:r>
-              <a:rPr lang="en-US" sz="1400" dirty="0">
-                <a:solidFill>
-                  <a:srgbClr val="E6EDF3"/>
-                </a:solidFill>
-                <a:latin typeface="Calibri" pitchFamily="34" charset="0"/>
-                <a:ea typeface="Calibri" pitchFamily="34" charset="-122"/>
-                <a:cs typeface="Calibri" pitchFamily="34" charset="-120"/>
-              </a:rPr>
-              <a:t>Noise kills trust in tools — triage well</a:t>
+              <a:t>Address technical debt early — cheaper than re-work later</a:t>
             </a:r>
             <a:endParaRPr lang="en-US" sz="1400" dirty="0"/>
           </a:p>
@@ -2774,11 +2753,11 @@
         <p:spPr>
           <a:xfrm>
             <a:off x="457200" y="1325880"/>
-            <a:ext cx="8229600" cy="1207008"/>
+            <a:ext cx="8229600" cy="896112"/>
           </a:xfrm>
           <a:prstGeom prst="roundRect">
             <a:avLst>
-              <a:gd name="adj" fmla="val 6061"/>
+              <a:gd name="adj" fmla="val 8163"/>
             </a:avLst>
           </a:prstGeom>
           <a:solidFill>
@@ -2803,7 +2782,7 @@
         <p:spPr>
           <a:xfrm>
             <a:off x="731520" y="1435608"/>
-            <a:ext cx="7680960" cy="987552"/>
+            <a:ext cx="7680960" cy="676656"/>
           </a:xfrm>
           <a:prstGeom prst="rect">
             <a:avLst/>
@@ -2831,7 +2810,7 @@
                 <a:ea typeface="Calibri" pitchFamily="34" charset="-122"/>
                 <a:cs typeface="Calibri" pitchFamily="34" charset="-120"/>
               </a:rPr>
-              <a:t>Run Semgrep + Gitleaks on a flawed repo</a:t>
+              <a:t>Run Semgrep + Gitleaks on the flawed repo</a:t>
             </a:r>
             <a:endParaRPr lang="en-US" sz="1400" dirty="0"/>
           </a:p>
@@ -2852,31 +2831,10 @@
                 <a:ea typeface="Calibri" pitchFamily="34" charset="-122"/>
                 <a:cs typeface="Calibri" pitchFamily="34" charset="-120"/>
               </a:rPr>
-              <a:t>Score = true positives − misclassified</a:t>
+              <a:t>Score = true positives − misclassified · live scoreboard</a:t>
             </a:r>
             <a:endParaRPr lang="en-US" sz="1400" dirty="0"/>
           </a:p>
-          <a:p>
-            <a:pPr marL="342900" indent="-342900">
-              <a:spcAft>
-                <a:spcPts val="600"/>
-              </a:spcAft>
-              <a:buSzPct val="100000"/>
-              <a:buChar char="•"/>
-            </a:pPr>
-            <a:r>
-              <a:rPr lang="en-US" sz="1400" dirty="0">
-                <a:solidFill>
-                  <a:srgbClr val="E6EDF3"/>
-                </a:solidFill>
-                <a:latin typeface="Calibri" pitchFamily="34" charset="0"/>
-                <a:ea typeface="Calibri" pitchFamily="34" charset="-122"/>
-                <a:cs typeface="Calibri" pitchFamily="34" charset="-120"/>
-              </a:rPr>
-              <a:t>Live scoreboard</a:t>
-            </a:r>
-            <a:endParaRPr lang="en-US" sz="1400" dirty="0"/>
-          </a:p>
         </p:txBody>
       </p:sp>
       <p:sp>
@@ -2887,7 +2845,7 @@
         </p:nvSpPr>
         <p:spPr>
           <a:xfrm>
-            <a:off x="457200" y="2697480"/>
+            <a:off x="457200" y="2386584"/>
             <a:ext cx="8229600" cy="786384"/>
           </a:xfrm>
           <a:prstGeom prst="roundRect">
@@ -2914,7 +2872,7 @@
         </p:nvSpPr>
         <p:spPr>
           <a:xfrm>
-            <a:off x="640080" y="2770632"/>
+            <a:off x="640080" y="2459736"/>
             <a:ext cx="7863840" cy="640080"/>
           </a:xfrm>
           <a:prstGeom prst="rect">
@@ -3513,11 +3471,11 @@
         <p:spPr>
           <a:xfrm>
             <a:off x="457200" y="1325880"/>
-            <a:ext cx="8229600" cy="1207008"/>
+            <a:ext cx="8229600" cy="1517904"/>
           </a:xfrm>
           <a:prstGeom prst="roundRect">
             <a:avLst>
-              <a:gd name="adj" fmla="val 6061"/>
+              <a:gd name="adj" fmla="val 4819"/>
             </a:avLst>
           </a:prstGeom>
           <a:solidFill>
@@ -3542,7 +3500,7 @@
         <p:spPr>
           <a:xfrm>
             <a:off x="731520" y="1435608"/>
-            <a:ext cx="7680960" cy="987552"/>
+            <a:ext cx="7680960" cy="1298448"/>
           </a:xfrm>
           <a:prstGeom prst="rect">
             <a:avLst/>
@@ -3613,6 +3571,27 @@
                 <a:cs typeface="Calibri" pitchFamily="34" charset="-120"/>
               </a:rPr>
               <a:t>1 fuzzing crash with a one-line root cause</a:t>
+            </a:r>
+            <a:endParaRPr lang="en-US" sz="1400" dirty="0"/>
+          </a:p>
+          <a:p>
+            <a:pPr marL="342900" indent="-342900">
+              <a:spcAft>
+                <a:spcPts val="600"/>
+              </a:spcAft>
+              <a:buSzPct val="100000"/>
+              <a:buChar char="•"/>
+            </a:pPr>
+            <a:r>
+              <a:rPr lang="en-US" sz="1400" dirty="0">
+                <a:solidFill>
+                  <a:srgbClr val="E6EDF3"/>
+                </a:solidFill>
+                <a:latin typeface="Calibri" pitchFamily="34" charset="0"/>
+                <a:ea typeface="Calibri" pitchFamily="34" charset="-122"/>
+                <a:cs typeface="Calibri" pitchFamily="34" charset="-120"/>
+              </a:rPr>
+              <a:t>+ Audit the AI and EiPE / Prompt Problem (see worksheet)</a:t>
             </a:r>
             <a:endParaRPr lang="en-US" sz="1400" dirty="0"/>
           </a:p>
@@ -4332,11 +4311,11 @@
         <p:spPr>
           <a:xfrm>
             <a:off x="457200" y="1325880"/>
-            <a:ext cx="8229600" cy="1828800"/>
+            <a:ext cx="8229600" cy="1517904"/>
           </a:xfrm>
           <a:prstGeom prst="roundRect">
             <a:avLst>
-              <a:gd name="adj" fmla="val 4000"/>
+              <a:gd name="adj" fmla="val 4819"/>
             </a:avLst>
           </a:prstGeom>
           <a:solidFill>
@@ -4361,7 +4340,7 @@
         <p:spPr>
           <a:xfrm>
             <a:off x="731520" y="1435608"/>
-            <a:ext cx="7680960" cy="1609344"/>
+            <a:ext cx="7680960" cy="1298448"/>
           </a:xfrm>
           <a:prstGeom prst="rect">
             <a:avLst/>
@@ -4389,7 +4368,7 @@
                 <a:ea typeface="Calibri" pitchFamily="34" charset="-122"/>
                 <a:cs typeface="Calibri" pitchFamily="34" charset="-120"/>
               </a:rPr>
-              <a:t>Security across the SDLC</a:t>
+              <a:t>Security across the SDLC ("shift left")</a:t>
             </a:r>
             <a:endParaRPr lang="en-US" sz="1400" dirty="0"/>
           </a:p>
@@ -4410,28 +4389,7 @@
                 <a:ea typeface="Calibri" pitchFamily="34" charset="-122"/>
                 <a:cs typeface="Calibri" pitchFamily="34" charset="-120"/>
               </a:rPr>
-              <a:t>SAST / DAST / SCA / secret scanning</a:t>
-            </a:r>
-            <a:endParaRPr lang="en-US" sz="1400" dirty="0"/>
-          </a:p>
-          <a:p>
-            <a:pPr marL="342900" indent="-342900">
-              <a:spcAft>
-                <a:spcPts val="600"/>
-              </a:spcAft>
-              <a:buSzPct val="100000"/>
-              <a:buChar char="•"/>
-            </a:pPr>
-            <a:r>
-              <a:rPr lang="en-US" sz="1400" dirty="0">
-                <a:solidFill>
-                  <a:srgbClr val="E6EDF3"/>
-                </a:solidFill>
-                <a:latin typeface="Calibri" pitchFamily="34" charset="0"/>
-                <a:ea typeface="Calibri" pitchFamily="34" charset="-122"/>
-                <a:cs typeface="Calibri" pitchFamily="34" charset="-120"/>
-              </a:rPr>
-              <a:t>Fuzzing — the modern bug-finder</a:t>
+              <a:t>SAST · DAST · SCA · secret scanning · fuzzing</a:t>
             </a:r>
             <a:endParaRPr lang="en-US" sz="1400" dirty="0"/>
           </a:p>
@@ -4473,7 +4431,7 @@
                 <a:ea typeface="Calibri" pitchFamily="34" charset="-122"/>
                 <a:cs typeface="Calibri" pitchFamily="34" charset="-120"/>
               </a:rPr>
-              <a:t>🎮 Game: Bug Triage Race + Fuzzing Race</a:t>
+              <a:t>🏁 Game: Bug Triage Race + a Fuzzing Race</a:t>
             </a:r>
             <a:endParaRPr lang="en-US" sz="1400" dirty="0"/>
           </a:p>
@@ -4759,7 +4717,7 @@
                 <a:ea typeface="Calibri" pitchFamily="34" charset="-122"/>
                 <a:cs typeface="Calibri" pitchFamily="34" charset="-120"/>
               </a:rPr>
-              <a:t>Threat modeling finds design flaws</a:t>
+              <a:t>Threat modeling finds design flaws (before code)</a:t>
             </a:r>
             <a:endParaRPr lang="en-US" sz="1400" dirty="0"/>
           </a:p>
@@ -4780,7 +4738,7 @@
                 <a:ea typeface="Calibri" pitchFamily="34" charset="-122"/>
                 <a:cs typeface="Calibri" pitchFamily="34" charset="-120"/>
               </a:rPr>
-              <a:t>This week: find implementation flaws — automatically</a:t>
+              <a:t>This week: find implementation flaws — automatically, at scale</a:t>
             </a:r>
             <a:endParaRPr lang="en-US" sz="1400" dirty="0"/>
           </a:p>
@@ -4801,7 +4759,7 @@
                 <a:ea typeface="Calibri" pitchFamily="34" charset="-122"/>
                 <a:cs typeface="Calibri" pitchFamily="34" charset="-120"/>
               </a:rPr>
-              <a:t>Shift left: catch bugs before they ship</a:t>
+              <a:t>Same goal: catch it early, cheap to fix</a:t>
             </a:r>
             <a:endParaRPr lang="en-US" sz="1400" dirty="0"/>
           </a:p>
@@ -7105,7 +7063,7 @@
                 <a:ea typeface="Arial" pitchFamily="34" charset="-122"/>
                 <a:cs typeface="Arial" pitchFamily="34" charset="-120"/>
               </a:rPr>
-              <a:t>SCA &amp; secret scanning</a:t>
+              <a:t>Worked example: what each tool catches</a:t>
             </a:r>
             <a:endParaRPr lang="en-US" sz="2600" dirty="0"/>
           </a:p>
@@ -7120,6 +7078,157 @@
         <p:spPr>
           <a:xfrm>
             <a:off x="457200" y="1325880"/>
+            <a:ext cx="8229600" cy="1810512"/>
+          </a:xfrm>
+          <a:prstGeom prst="roundRect">
+            <a:avLst>
+              <a:gd name="adj" fmla="val 3030"/>
+            </a:avLst>
+          </a:prstGeom>
+          <a:solidFill>
+            <a:srgbClr val="0A1020"/>
+          </a:solidFill>
+          <a:ln w="12700">
+            <a:solidFill>
+              <a:srgbClr val="1E2B45"/>
+            </a:solidFill>
+            <a:prstDash val="solid"/>
+          </a:ln>
+        </p:spPr>
+      </p:sp>
+      <p:sp>
+        <p:nvSpPr>
+          <p:cNvPr id="6" name="Text 3"/>
+          <p:cNvSpPr/>
+          <p:nvPr/>
+        </p:nvSpPr>
+        <p:spPr>
+          <a:xfrm>
+            <a:off x="640080" y="1399032"/>
+            <a:ext cx="7863840" cy="1664208"/>
+          </a:xfrm>
+          <a:prstGeom prst="rect">
+            <a:avLst/>
+          </a:prstGeom>
+          <a:noFill/>
+          <a:ln/>
+        </p:spPr>
+        <p:txBody>
+          <a:bodyPr wrap="square" lIns="0" tIns="0" rIns="0" bIns="0" rtlCol="0" anchor="t"/>
+          <a:lstStyle/>
+          <a:p>
+            <a:pPr indent="0" marL="0">
+              <a:buNone/>
+            </a:pPr>
+            <a:r>
+              <a:rPr lang="en-US" sz="1150" dirty="0">
+                <a:solidFill>
+                  <a:srgbClr val="9FE7D6"/>
+                </a:solidFill>
+                <a:latin typeface="Courier New" pitchFamily="34" charset="0"/>
+                <a:ea typeface="Courier New" pitchFamily="34" charset="-122"/>
+                <a:cs typeface="Courier New" pitchFamily="34" charset="-120"/>
+              </a:rPr>
+              <a:t>@app.route("/user")</a:t>
+            </a:r>
+            <a:endParaRPr lang="en-US" sz="1150" dirty="0"/>
+          </a:p>
+          <a:p>
+            <a:pPr indent="0" marL="0">
+              <a:buNone/>
+            </a:pPr>
+            <a:r>
+              <a:rPr lang="en-US" sz="1150" dirty="0">
+                <a:solidFill>
+                  <a:srgbClr val="9FE7D6"/>
+                </a:solidFill>
+                <a:latin typeface="Courier New" pitchFamily="34" charset="0"/>
+                <a:ea typeface="Courier New" pitchFamily="34" charset="-122"/>
+                <a:cs typeface="Courier New" pitchFamily="34" charset="-120"/>
+              </a:rPr>
+              <a:t>def user():</a:t>
+            </a:r>
+            <a:endParaRPr lang="en-US" sz="1150" dirty="0"/>
+          </a:p>
+          <a:p>
+            <a:pPr indent="0" marL="0">
+              <a:buNone/>
+            </a:pPr>
+            <a:r>
+              <a:rPr lang="en-US" sz="1150" dirty="0">
+                <a:solidFill>
+                  <a:srgbClr val="9FE7D6"/>
+                </a:solidFill>
+                <a:latin typeface="Courier New" pitchFamily="34" charset="0"/>
+                <a:ea typeface="Courier New" pitchFamily="34" charset="-122"/>
+                <a:cs typeface="Courier New" pitchFamily="34" charset="-120"/>
+              </a:rPr>
+              <a:t>    name = request.args.get("name")</a:t>
+            </a:r>
+            <a:endParaRPr lang="en-US" sz="1150" dirty="0"/>
+          </a:p>
+          <a:p>
+            <a:pPr indent="0" marL="0">
+              <a:buNone/>
+            </a:pPr>
+            <a:r>
+              <a:rPr lang="en-US" sz="1150" dirty="0">
+                <a:solidFill>
+                  <a:srgbClr val="9FE7D6"/>
+                </a:solidFill>
+                <a:latin typeface="Courier New" pitchFamily="34" charset="0"/>
+                <a:ea typeface="Courier New" pitchFamily="34" charset="-122"/>
+                <a:cs typeface="Courier New" pitchFamily="34" charset="-120"/>
+              </a:rPr>
+              <a:t>    q = "SELECT * FROM users WHERE name='%s'" % name   # SAST → CWE-89</a:t>
+            </a:r>
+            <a:endParaRPr lang="en-US" sz="1150" dirty="0"/>
+          </a:p>
+          <a:p>
+            <a:pPr indent="0" marL="0">
+              <a:buNone/>
+            </a:pPr>
+            <a:r>
+              <a:rPr lang="en-US" sz="1150" dirty="0">
+                <a:solidFill>
+                  <a:srgbClr val="9FE7D6"/>
+                </a:solidFill>
+                <a:latin typeface="Courier New" pitchFamily="34" charset="0"/>
+                <a:ea typeface="Courier New" pitchFamily="34" charset="-122"/>
+                <a:cs typeface="Courier New" pitchFamily="34" charset="-120"/>
+              </a:rPr>
+              <a:t>    return db.execute(q).fetchall()</a:t>
+            </a:r>
+            <a:endParaRPr lang="en-US" sz="1150" dirty="0"/>
+          </a:p>
+          <a:p>
+            <a:pPr indent="0" marL="0">
+              <a:buNone/>
+            </a:pPr>
+            <a:r>
+              <a:rPr lang="en-US" sz="1150" dirty="0">
+                <a:solidFill>
+                  <a:srgbClr val="9FE7D6"/>
+                </a:solidFill>
+                <a:latin typeface="Courier New" pitchFamily="34" charset="0"/>
+                <a:ea typeface="Courier New" pitchFamily="34" charset="-122"/>
+                <a:cs typeface="Courier New" pitchFamily="34" charset="-120"/>
+              </a:rPr>
+              <a:t>AWS_SECRET = "wJalr...EXAMPLEKEY"                       # Gitleaks → CWE-798</a:t>
+            </a:r>
+            <a:endParaRPr lang="en-US" sz="1150" dirty="0"/>
+          </a:p>
+        </p:txBody>
+      </p:sp>
+      <p:sp>
+        <p:nvSpPr>
+          <p:cNvPr id="7" name="Shape 4"/>
+          <p:cNvSpPr/>
+          <p:nvPr/>
+        </p:nvSpPr>
+        <p:spPr>
+          <a:xfrm>
+            <a:off x="457200" y="3300984"/>
             <a:ext cx="8229600" cy="1207008"/>
           </a:xfrm>
           <a:prstGeom prst="roundRect">
@@ -7142,13 +7251,13 @@
       </p:sp>
       <p:sp>
         <p:nvSpPr>
-          <p:cNvPr id="6" name="Text 3"/>
-          <p:cNvSpPr/>
-          <p:nvPr/>
-        </p:nvSpPr>
-        <p:spPr>
-          <a:xfrm>
-            <a:off x="731520" y="1435608"/>
+          <p:cNvPr id="8" name="Text 5"/>
+          <p:cNvSpPr/>
+          <p:nvPr/>
+        </p:nvSpPr>
+        <p:spPr>
+          <a:xfrm>
+            <a:off x="731520" y="3410712"/>
             <a:ext cx="7680960" cy="987552"/>
           </a:xfrm>
           <a:prstGeom prst="rect">
@@ -7177,7 +7286,7 @@
                 <a:ea typeface="Calibri" pitchFamily="34" charset="-122"/>
                 <a:cs typeface="Calibri" pitchFamily="34" charset="-120"/>
               </a:rPr>
-              <a:t>SCA — your dependencies' known CVEs (deep dive in Wk 12)</a:t>
+              <a:t>Semgrep (SAST): flags the string-built SQL query (CWE-89)</a:t>
             </a:r>
             <a:endParaRPr lang="en-US" sz="1400" dirty="0"/>
           </a:p>
@@ -7198,7 +7307,7 @@
                 <a:ea typeface="Calibri" pitchFamily="34" charset="-122"/>
                 <a:cs typeface="Calibri" pitchFamily="34" charset="-120"/>
               </a:rPr>
-              <a:t>Secret scanning — API keys/passwords committed to git history</a:t>
+              <a:t>Gitleaks (secret scan): flags the hardcoded AWS key (CWE-798)</a:t>
             </a:r>
             <a:endParaRPr lang="en-US" sz="1400" dirty="0"/>
           </a:p>
@@ -7219,7 +7328,7 @@
                 <a:ea typeface="Calibri" pitchFamily="34" charset="-122"/>
                 <a:cs typeface="Calibri" pitchFamily="34" charset="-120"/>
               </a:rPr>
-              <a:t>Both run automatically in CI</a:t>
+              <a:t>DAST/fuzzer: would catch a crash/SQLi by hitting /user, not reading it</a:t>
             </a:r>
             <a:endParaRPr lang="en-US" sz="1400" dirty="0"/>
           </a:p>
@@ -7227,7 +7336,7 @@
       </p:sp>
       <p:sp>
         <p:nvSpPr>
-          <p:cNvPr id="7" name="Text 4"/>
+          <p:cNvPr id="9" name="Text 6"/>
           <p:cNvSpPr/>
           <p:nvPr/>
         </p:nvSpPr>
@@ -7266,7 +7375,7 @@
       </p:sp>
       <p:sp>
         <p:nvSpPr>
-          <p:cNvPr id="8" name="Shape 5"/>
+          <p:cNvPr id="10" name="Shape 7"/>
           <p:cNvSpPr/>
           <p:nvPr/>
         </p:nvSpPr>
@@ -7295,7 +7404,7 @@
       </p:sp>
       <p:pic>
         <p:nvPicPr>
-          <p:cNvPr id="9" name="Image 1" descr="/Users/pop7/Library/CloudStorage/OneDrive-MonsterConnectCo.,Ltd/Lecture/KOSEN69 - software-security/slides/pptx/assets/logo-small.png">    </p:cNvPr>
+          <p:cNvPr id="11" name="Image 1" descr="/Users/pop7/Library/CloudStorage/OneDrive-MonsterConnectCo.,Ltd/Lecture/KOSEN69 - software-security/slides/pptx/assets/logo-small.png">    </p:cNvPr>
           <p:cNvPicPr>
             <a:picLocks noChangeAspect="1"/>
           </p:cNvPicPr>
@@ -7433,7 +7542,7 @@
                 <a:ea typeface="Arial" pitchFamily="34" charset="-122"/>
                 <a:cs typeface="Arial" pitchFamily="34" charset="-120"/>
               </a:rPr>
-              <a:t>Tools you'll meet</a:t>
+              <a:t>Fuzzing — how real CVEs are found</a:t>
             </a:r>
             <a:endParaRPr lang="en-US" sz="2600" dirty="0"/>
           </a:p>
@@ -7505,7 +7614,7 @@
                 <a:ea typeface="Calibri" pitchFamily="34" charset="-122"/>
                 <a:cs typeface="Calibri" pitchFamily="34" charset="-120"/>
               </a:rPr>
-              <a:t>SonarQube — code quality + SAST against the "7 axes" (bugs, duplication, complexity, coverage…)</a:t>
+              <a:t>Feed random/mutated inputs, watch for crashes</a:t>
             </a:r>
             <a:endParaRPr lang="en-US" sz="1400" dirty="0"/>
           </a:p>
@@ -7526,7 +7635,7 @@
                 <a:ea typeface="Calibri" pitchFamily="34" charset="-122"/>
                 <a:cs typeface="Calibri" pitchFamily="34" charset="-120"/>
               </a:rPr>
-              <a:t>GitHub Advanced Security (GHAS) — CodeQL + secret scanning + Dependabot, native in the repo</a:t>
+              <a:t>Coverage-guided (libFuzzer/AFL++) explores new code paths</a:t>
             </a:r>
             <a:endParaRPr lang="en-US" sz="1400" dirty="0"/>
           </a:p>
@@ -7547,7 +7656,7 @@
                 <a:ea typeface="Calibri" pitchFamily="34" charset="-122"/>
                 <a:cs typeface="Calibri" pitchFamily="34" charset="-120"/>
               </a:rPr>
-              <a:t>Address technical debt early — cheaper than re-work later</a:t>
+              <a:t>Pair with sanitizers (ASan) to pinpoint the bug</a:t>
             </a:r>
             <a:endParaRPr lang="en-US" sz="1400" dirty="0"/>
           </a:p>
@@ -7555,7 +7664,73 @@
       </p:sp>
       <p:sp>
         <p:nvSpPr>
-          <p:cNvPr id="7" name="Text 4"/>
+          <p:cNvPr id="7" name="Shape 4"/>
+          <p:cNvSpPr/>
+          <p:nvPr/>
+        </p:nvSpPr>
+        <p:spPr>
+          <a:xfrm>
+            <a:off x="457200" y="2697480"/>
+            <a:ext cx="8229600" cy="530352"/>
+          </a:xfrm>
+          <a:prstGeom prst="roundRect">
+            <a:avLst>
+              <a:gd name="adj" fmla="val 10345"/>
+            </a:avLst>
+          </a:prstGeom>
+          <a:solidFill>
+            <a:srgbClr val="0A1020"/>
+          </a:solidFill>
+          <a:ln w="12700">
+            <a:solidFill>
+              <a:srgbClr val="1E2B45"/>
+            </a:solidFill>
+            <a:prstDash val="solid"/>
+          </a:ln>
+        </p:spPr>
+      </p:sp>
+      <p:sp>
+        <p:nvSpPr>
+          <p:cNvPr id="8" name="Text 5"/>
+          <p:cNvSpPr/>
+          <p:nvPr/>
+        </p:nvSpPr>
+        <p:spPr>
+          <a:xfrm>
+            <a:off x="640080" y="2770632"/>
+            <a:ext cx="7863840" cy="384048"/>
+          </a:xfrm>
+          <a:prstGeom prst="rect">
+            <a:avLst/>
+          </a:prstGeom>
+          <a:noFill/>
+          <a:ln/>
+        </p:spPr>
+        <p:txBody>
+          <a:bodyPr wrap="square" lIns="0" tIns="0" rIns="0" bIns="0" rtlCol="0" anchor="t"/>
+          <a:lstStyle/>
+          <a:p>
+            <a:pPr indent="0" marL="0">
+              <a:buNone/>
+            </a:pPr>
+            <a:r>
+              <a:rPr lang="en-US" sz="1150" dirty="0">
+                <a:solidFill>
+                  <a:srgbClr val="9FE7D6"/>
+                </a:solidFill>
+                <a:latin typeface="Courier New" pitchFamily="34" charset="0"/>
+                <a:ea typeface="Courier New" pitchFamily="34" charset="-122"/>
+                <a:cs typeface="Courier New" pitchFamily="34" charset="-120"/>
+              </a:rPr>
+              <a:t>clang -fsanitize=address,fuzzer harness.c -o fuzz &amp;&amp; ./fuzz</a:t>
+            </a:r>
+            <a:endParaRPr lang="en-US" sz="1150" dirty="0"/>
+          </a:p>
+        </p:txBody>
+      </p:sp>
+      <p:sp>
+        <p:nvSpPr>
+          <p:cNvPr id="9" name="Text 6"/>
           <p:cNvSpPr/>
           <p:nvPr/>
         </p:nvSpPr>
@@ -7594,7 +7769,7 @@
       </p:sp>
       <p:sp>
         <p:nvSpPr>
-          <p:cNvPr id="8" name="Shape 5"/>
+          <p:cNvPr id="10" name="Shape 7"/>
           <p:cNvSpPr/>
           <p:nvPr/>
         </p:nvSpPr>
@@ -7623,7 +7798,7 @@
       </p:sp>
       <p:pic>
         <p:nvPicPr>
-          <p:cNvPr id="9" name="Image 1" descr="/Users/pop7/Library/CloudStorage/OneDrive-MonsterConnectCo.,Ltd/Lecture/KOSEN69 - software-security/slides/pptx/assets/logo-small.png">    </p:cNvPr>
+          <p:cNvPr id="11" name="Image 1" descr="/Users/pop7/Library/CloudStorage/OneDrive-MonsterConnectCo.,Ltd/Lecture/KOSEN69 - software-security/slides/pptx/assets/logo-small.png">    </p:cNvPr>
           <p:cNvPicPr>
             <a:picLocks noChangeAspect="1"/>
           </p:cNvPicPr>
@@ -7761,7 +7936,7 @@
                 <a:ea typeface="Arial" pitchFamily="34" charset="-122"/>
                 <a:cs typeface="Arial" pitchFamily="34" charset="-120"/>
               </a:rPr>
-              <a:t>Fuzzing — how real CVEs are found</a:t>
+              <a:t>Triage: not every finding is a bug</a:t>
             </a:r>
             <a:endParaRPr lang="en-US" sz="2600" dirty="0"/>
           </a:p>
@@ -7776,11 +7951,11 @@
         <p:spPr>
           <a:xfrm>
             <a:off x="457200" y="1325880"/>
-            <a:ext cx="8229600" cy="1207008"/>
+            <a:ext cx="8229600" cy="1517904"/>
           </a:xfrm>
           <a:prstGeom prst="roundRect">
             <a:avLst>
-              <a:gd name="adj" fmla="val 6061"/>
+              <a:gd name="adj" fmla="val 4819"/>
             </a:avLst>
           </a:prstGeom>
           <a:solidFill>
@@ -7805,7 +7980,7 @@
         <p:spPr>
           <a:xfrm>
             <a:off x="731520" y="1435608"/>
-            <a:ext cx="7680960" cy="987552"/>
+            <a:ext cx="7680960" cy="1298448"/>
           </a:xfrm>
           <a:prstGeom prst="rect">
             <a:avLst/>
@@ -7833,7 +8008,7 @@
                 <a:ea typeface="Calibri" pitchFamily="34" charset="-122"/>
                 <a:cs typeface="Calibri" pitchFamily="34" charset="-120"/>
               </a:rPr>
-              <a:t>Feed random/mutated inputs, watch for crashes</a:t>
+              <a:t>True positive vs false positive</a:t>
             </a:r>
             <a:endParaRPr lang="en-US" sz="1400" dirty="0"/>
           </a:p>
@@ -7854,7 +8029,7 @@
                 <a:ea typeface="Calibri" pitchFamily="34" charset="-122"/>
                 <a:cs typeface="Calibri" pitchFamily="34" charset="-120"/>
               </a:rPr>
-              <a:t>Coverage-guided (libFuzzer/AFL++) explores new paths</a:t>
+              <a:t>Map each to a CWE + severity</a:t>
             </a:r>
             <a:endParaRPr lang="en-US" sz="1400" dirty="0"/>
           </a:p>
@@ -7875,81 +8050,36 @@
                 <a:ea typeface="Calibri" pitchFamily="34" charset="-122"/>
                 <a:cs typeface="Calibri" pitchFamily="34" charset="-120"/>
               </a:rPr>
-              <a:t>Pair with sanitizers (ASan) to pinpoint the bug</a:t>
+              <a:t>Prioritize by exploitability × impact</a:t>
             </a:r>
             <a:endParaRPr lang="en-US" sz="1400" dirty="0"/>
           </a:p>
+          <a:p>
+            <a:pPr marL="342900" indent="-342900">
+              <a:spcAft>
+                <a:spcPts val="600"/>
+              </a:spcAft>
+              <a:buSzPct val="100000"/>
+              <a:buChar char="•"/>
+            </a:pPr>
+            <a:r>
+              <a:rPr lang="en-US" sz="1400" dirty="0">
+                <a:solidFill>
+                  <a:srgbClr val="E6EDF3"/>
+                </a:solidFill>
+                <a:latin typeface="Calibri" pitchFamily="34" charset="0"/>
+                <a:ea typeface="Calibri" pitchFamily="34" charset="-122"/>
+                <a:cs typeface="Calibri" pitchFamily="34" charset="-120"/>
+              </a:rPr>
+              <a:t>Noise kills trust in tools — triage well</a:t>
+            </a:r>
+            <a:endParaRPr lang="en-US" sz="1400" dirty="0"/>
+          </a:p>
         </p:txBody>
       </p:sp>
       <p:sp>
         <p:nvSpPr>
-          <p:cNvPr id="7" name="Shape 4"/>
-          <p:cNvSpPr/>
-          <p:nvPr/>
-        </p:nvSpPr>
-        <p:spPr>
-          <a:xfrm>
-            <a:off x="457200" y="2697480"/>
-            <a:ext cx="8229600" cy="530352"/>
-          </a:xfrm>
-          <a:prstGeom prst="roundRect">
-            <a:avLst>
-              <a:gd name="adj" fmla="val 10345"/>
-            </a:avLst>
-          </a:prstGeom>
-          <a:solidFill>
-            <a:srgbClr val="0A1020"/>
-          </a:solidFill>
-          <a:ln w="12700">
-            <a:solidFill>
-              <a:srgbClr val="1E2B45"/>
-            </a:solidFill>
-            <a:prstDash val="solid"/>
-          </a:ln>
-        </p:spPr>
-      </p:sp>
-      <p:sp>
-        <p:nvSpPr>
-          <p:cNvPr id="8" name="Text 5"/>
-          <p:cNvSpPr/>
-          <p:nvPr/>
-        </p:nvSpPr>
-        <p:spPr>
-          <a:xfrm>
-            <a:off x="640080" y="2770632"/>
-            <a:ext cx="7863840" cy="384048"/>
-          </a:xfrm>
-          <a:prstGeom prst="rect">
-            <a:avLst/>
-          </a:prstGeom>
-          <a:noFill/>
-          <a:ln/>
-        </p:spPr>
-        <p:txBody>
-          <a:bodyPr wrap="square" lIns="0" tIns="0" rIns="0" bIns="0" rtlCol="0" anchor="t"/>
-          <a:lstStyle/>
-          <a:p>
-            <a:pPr indent="0" marL="0">
-              <a:buNone/>
-            </a:pPr>
-            <a:r>
-              <a:rPr lang="en-US" sz="1150" dirty="0">
-                <a:solidFill>
-                  <a:srgbClr val="9FE7D6"/>
-                </a:solidFill>
-                <a:latin typeface="Courier New" pitchFamily="34" charset="0"/>
-                <a:ea typeface="Courier New" pitchFamily="34" charset="-122"/>
-                <a:cs typeface="Courier New" pitchFamily="34" charset="-120"/>
-              </a:rPr>
-              <a:t>clang -fsanitize=address,fuzzer harness.c -o fuzz &amp;&amp; ./fuzz</a:t>
-            </a:r>
-            <a:endParaRPr lang="en-US" sz="1150" dirty="0"/>
-          </a:p>
-        </p:txBody>
-      </p:sp>
-      <p:sp>
-        <p:nvSpPr>
-          <p:cNvPr id="9" name="Text 6"/>
+          <p:cNvPr id="7" name="Text 4"/>
           <p:cNvSpPr/>
           <p:nvPr/>
         </p:nvSpPr>
@@ -7988,7 +8118,7 @@
       </p:sp>
       <p:sp>
         <p:nvSpPr>
-          <p:cNvPr id="10" name="Shape 7"/>
+          <p:cNvPr id="8" name="Shape 5"/>
           <p:cNvSpPr/>
           <p:nvPr/>
         </p:nvSpPr>
@@ -8017,7 +8147,7 @@
       </p:sp>
       <p:pic>
         <p:nvPicPr>
-          <p:cNvPr id="11" name="Image 1" descr="/Users/pop7/Library/CloudStorage/OneDrive-MonsterConnectCo.,Ltd/Lecture/KOSEN69 - software-security/slides/pptx/assets/logo-small.png">    </p:cNvPr>
+          <p:cNvPr id="9" name="Image 1" descr="/Users/pop7/Library/CloudStorage/OneDrive-MonsterConnectCo.,Ltd/Lecture/KOSEN69 - software-security/slides/pptx/assets/logo-small.png">    </p:cNvPr>
           <p:cNvPicPr>
             <a:picLocks noChangeAspect="1"/>
           </p:cNvPicPr>

--- a/slides/pptx/week02.pptx
+++ b/slides/pptx/week02.pptx
@@ -2103,7 +2103,7 @@
     <p:bg>
       <p:bgPr>
         <a:solidFill>
-          <a:srgbClr val="0E1726"/>
+          <a:srgbClr val="FFFFFF"/>
         </a:solidFill>
       </p:bgPr>
     </p:bg>
@@ -2121,38 +2121,9 @@
           <a:chExt cx="0" cy="0"/>
         </a:xfrm>
       </p:grpSpPr>
-      <p:sp>
-        <p:nvSpPr>
-          <p:cNvPr id="2" name="Shape 0"/>
-          <p:cNvSpPr/>
-          <p:nvPr/>
-        </p:nvSpPr>
-        <p:spPr>
-          <a:xfrm>
-            <a:off x="603504" y="411480"/>
-            <a:ext cx="1874520" cy="932688"/>
-          </a:xfrm>
-          <a:prstGeom prst="roundRect">
-            <a:avLst>
-              <a:gd name="adj" fmla="val 7843"/>
-            </a:avLst>
-          </a:prstGeom>
-          <a:solidFill>
-            <a:srgbClr val="FFFFFF"/>
-          </a:solidFill>
-          <a:ln/>
-          <a:effectLst>
-            <a:outerShdw sx="100000" sy="100000" kx="0" ky="0" algn="bl" rotWithShape="0" blurRad="101600" dist="38100" dir="5400000">
-              <a:srgbClr val="000000">
-                <a:alpha val="35000"/>
-              </a:srgbClr>
-            </a:outerShdw>
-          </a:effectLst>
-        </p:spPr>
-      </p:sp>
       <p:pic>
         <p:nvPicPr>
-          <p:cNvPr id="3" name="Image 0" descr="/Users/pop7/Library/CloudStorage/OneDrive-MonsterConnectCo.,Ltd/Lecture/KOSEN69 - software-security/slides/pptx/assets/logo-small.png">    </p:cNvPr>
+          <p:cNvPr id="2" name="Image 0" descr="/Users/pop7/Library/CloudStorage/OneDrive-MonsterConnectCo.,Ltd/Lecture/KOSEN69 - software-security/slides/pptx/assets/logo-small.png">    </p:cNvPr>
           <p:cNvPicPr>
             <a:picLocks noChangeAspect="1"/>
           </p:cNvPicPr>
@@ -2166,8 +2137,8 @@
         </p:blipFill>
         <p:spPr>
           <a:xfrm>
-            <a:off x="758952" y="566928"/>
-            <a:ext cx="1563624" cy="621792"/>
+            <a:off x="640080" y="502920"/>
+            <a:ext cx="1691640" cy="676656"/>
           </a:xfrm>
           <a:prstGeom prst="rect">
             <a:avLst/>
@@ -2176,7 +2147,7 @@
       </p:pic>
       <p:sp>
         <p:nvSpPr>
-          <p:cNvPr id="4" name="Text 1"/>
+          <p:cNvPr id="3" name="Text 0"/>
           <p:cNvSpPr/>
           <p:nvPr/>
         </p:nvSpPr>
@@ -2215,7 +2186,7 @@
       </p:sp>
       <p:sp>
         <p:nvSpPr>
-          <p:cNvPr id="5" name="Text 2"/>
+          <p:cNvPr id="4" name="Text 1"/>
           <p:cNvSpPr/>
           <p:nvPr/>
         </p:nvSpPr>
@@ -2243,7 +2214,7 @@
             <a:r>
               <a:rPr lang="en-US" sz="4000" b="1" dirty="0">
                 <a:solidFill>
-                  <a:srgbClr val="E6EDF3"/>
+                  <a:srgbClr val="1F2937"/>
                 </a:solidFill>
                 <a:latin typeface="Arial" pitchFamily="34" charset="0"/>
                 <a:ea typeface="Arial" pitchFamily="34" charset="-122"/>
@@ -2257,7 +2228,7 @@
       </p:sp>
       <p:sp>
         <p:nvSpPr>
-          <p:cNvPr id="6" name="Text 3"/>
+          <p:cNvPr id="5" name="Text 2"/>
           <p:cNvSpPr/>
           <p:nvPr/>
         </p:nvSpPr>
@@ -2282,7 +2253,7 @@
             <a:r>
               <a:rPr lang="en-US" sz="1400" dirty="0">
                 <a:solidFill>
-                  <a:srgbClr val="94A3B8"/>
+                  <a:srgbClr val="64748B"/>
                 </a:solidFill>
                 <a:latin typeface="Calibri" pitchFamily="34" charset="0"/>
                 <a:ea typeface="Calibri" pitchFamily="34" charset="-122"/>
@@ -2308,7 +2279,7 @@
     <p:bg>
       <p:bgPr>
         <a:solidFill>
-          <a:srgbClr val="0E1726"/>
+          <a:srgbClr val="FFFFFF"/>
         </a:solidFill>
       </p:bgPr>
     </p:bg>
@@ -2345,9 +2316,9 @@
           </a:solidFill>
           <a:ln/>
           <a:effectLst>
-            <a:outerShdw sx="100000" sy="100000" kx="0" ky="0" algn="bl" rotWithShape="0" blurRad="101600" dist="38100" dir="5400000">
+            <a:outerShdw sx="100000" sy="100000" kx="0" ky="0" algn="bl" rotWithShape="0" blurRad="76200" dist="25400" dir="5400000">
               <a:srgbClr val="000000">
-                <a:alpha val="35000"/>
+                <a:alpha val="12000"/>
               </a:srgbClr>
             </a:outerShdw>
           </a:effectLst>
@@ -2404,7 +2375,7 @@
             <a:r>
               <a:rPr lang="en-US" sz="2600" b="1" dirty="0">
                 <a:solidFill>
-                  <a:srgbClr val="E6EDF3"/>
+                  <a:srgbClr val="1F2937"/>
                 </a:solidFill>
                 <a:latin typeface="Arial" pitchFamily="34" charset="0"/>
                 <a:ea typeface="Arial" pitchFamily="34" charset="-122"/>
@@ -2433,13 +2404,13 @@
             </a:avLst>
           </a:prstGeom>
           <a:solidFill>
-            <a:srgbClr val="18243A"/>
+            <a:srgbClr val="F1F5F9"/>
           </a:solidFill>
           <a:ln/>
           <a:effectLst>
-            <a:outerShdw sx="100000" sy="100000" kx="0" ky="0" algn="bl" rotWithShape="0" blurRad="101600" dist="38100" dir="5400000">
+            <a:outerShdw sx="100000" sy="100000" kx="0" ky="0" algn="bl" rotWithShape="0" blurRad="76200" dist="25400" dir="5400000">
               <a:srgbClr val="000000">
-                <a:alpha val="35000"/>
+                <a:alpha val="12000"/>
               </a:srgbClr>
             </a:outerShdw>
           </a:effectLst>
@@ -2476,7 +2447,7 @@
             <a:r>
               <a:rPr lang="en-US" sz="1400" dirty="0">
                 <a:solidFill>
-                  <a:srgbClr val="E6EDF3"/>
+                  <a:srgbClr val="1F2937"/>
                 </a:solidFill>
                 <a:latin typeface="Calibri" pitchFamily="34" charset="0"/>
                 <a:ea typeface="Calibri" pitchFamily="34" charset="-122"/>
@@ -2497,7 +2468,7 @@
             <a:r>
               <a:rPr lang="en-US" sz="1400" dirty="0">
                 <a:solidFill>
-                  <a:srgbClr val="E6EDF3"/>
+                  <a:srgbClr val="1F2937"/>
                 </a:solidFill>
                 <a:latin typeface="Calibri" pitchFamily="34" charset="0"/>
                 <a:ea typeface="Calibri" pitchFamily="34" charset="-122"/>
@@ -2518,7 +2489,7 @@
             <a:r>
               <a:rPr lang="en-US" sz="1400" dirty="0">
                 <a:solidFill>
-                  <a:srgbClr val="E6EDF3"/>
+                  <a:srgbClr val="1F2937"/>
                 </a:solidFill>
                 <a:latin typeface="Calibri" pitchFamily="34" charset="0"/>
                 <a:ea typeface="Calibri" pitchFamily="34" charset="-122"/>
@@ -2557,7 +2528,7 @@
             <a:r>
               <a:rPr lang="en-US" sz="900" dirty="0">
                 <a:solidFill>
-                  <a:srgbClr val="94A3B8"/>
+                  <a:srgbClr val="64748B"/>
                 </a:solidFill>
                 <a:latin typeface="Calibri" pitchFamily="34" charset="0"/>
                 <a:ea typeface="Calibri" pitchFamily="34" charset="-122"/>
@@ -2569,38 +2540,9 @@
           </a:p>
         </p:txBody>
       </p:sp>
-      <p:sp>
-        <p:nvSpPr>
-          <p:cNvPr id="8" name="Shape 5"/>
-          <p:cNvSpPr/>
-          <p:nvPr/>
-        </p:nvSpPr>
-        <p:spPr>
-          <a:xfrm>
-            <a:off x="7772400" y="4590288"/>
-            <a:ext cx="969264" cy="475488"/>
-          </a:xfrm>
-          <a:prstGeom prst="roundRect">
-            <a:avLst>
-              <a:gd name="adj" fmla="val 11538"/>
-            </a:avLst>
-          </a:prstGeom>
-          <a:solidFill>
-            <a:srgbClr val="FFFFFF"/>
-          </a:solidFill>
-          <a:ln/>
-          <a:effectLst>
-            <a:outerShdw sx="100000" sy="100000" kx="0" ky="0" algn="bl" rotWithShape="0" blurRad="101600" dist="38100" dir="5400000">
-              <a:srgbClr val="000000">
-                <a:alpha val="35000"/>
-              </a:srgbClr>
-            </a:outerShdw>
-          </a:effectLst>
-        </p:spPr>
-      </p:sp>
       <p:pic>
         <p:nvPicPr>
-          <p:cNvPr id="9" name="Image 1" descr="/Users/pop7/Library/CloudStorage/OneDrive-MonsterConnectCo.,Ltd/Lecture/KOSEN69 - software-security/slides/pptx/assets/logo-small.png">    </p:cNvPr>
+          <p:cNvPr id="8" name="Image 1" descr="/Users/pop7/Library/CloudStorage/OneDrive-MonsterConnectCo.,Ltd/Lecture/KOSEN69 - software-security/slides/pptx/assets/logo-small.png">    </p:cNvPr>
           <p:cNvPicPr>
             <a:picLocks noChangeAspect="1"/>
           </p:cNvPicPr>
@@ -2614,7 +2556,7 @@
         </p:blipFill>
         <p:spPr>
           <a:xfrm>
-            <a:off x="7872984" y="4681728"/>
+            <a:off x="7882128" y="4700016"/>
             <a:ext cx="768096" cy="356616"/>
           </a:xfrm>
           <a:prstGeom prst="rect">
@@ -2636,7 +2578,7 @@
     <p:bg>
       <p:bgPr>
         <a:solidFill>
-          <a:srgbClr val="0E1726"/>
+          <a:srgbClr val="FFFFFF"/>
         </a:solidFill>
       </p:bgPr>
     </p:bg>
@@ -2673,9 +2615,9 @@
           </a:solidFill>
           <a:ln/>
           <a:effectLst>
-            <a:outerShdw sx="100000" sy="100000" kx="0" ky="0" algn="bl" rotWithShape="0" blurRad="101600" dist="38100" dir="5400000">
+            <a:outerShdw sx="100000" sy="100000" kx="0" ky="0" algn="bl" rotWithShape="0" blurRad="76200" dist="25400" dir="5400000">
               <a:srgbClr val="000000">
-                <a:alpha val="35000"/>
+                <a:alpha val="12000"/>
               </a:srgbClr>
             </a:outerShdw>
           </a:effectLst>
@@ -2732,7 +2674,7 @@
             <a:r>
               <a:rPr lang="en-US" sz="2600" b="1" dirty="0">
                 <a:solidFill>
-                  <a:srgbClr val="E6EDF3"/>
+                  <a:srgbClr val="1F2937"/>
                 </a:solidFill>
                 <a:latin typeface="Arial" pitchFamily="34" charset="0"/>
                 <a:ea typeface="Arial" pitchFamily="34" charset="-122"/>
@@ -2761,13 +2703,13 @@
             </a:avLst>
           </a:prstGeom>
           <a:solidFill>
-            <a:srgbClr val="18243A"/>
+            <a:srgbClr val="F1F5F9"/>
           </a:solidFill>
           <a:ln/>
           <a:effectLst>
-            <a:outerShdw sx="100000" sy="100000" kx="0" ky="0" algn="bl" rotWithShape="0" blurRad="101600" dist="38100" dir="5400000">
+            <a:outerShdw sx="100000" sy="100000" kx="0" ky="0" algn="bl" rotWithShape="0" blurRad="76200" dist="25400" dir="5400000">
               <a:srgbClr val="000000">
-                <a:alpha val="35000"/>
+                <a:alpha val="12000"/>
               </a:srgbClr>
             </a:outerShdw>
           </a:effectLst>
@@ -2804,7 +2746,7 @@
             <a:r>
               <a:rPr lang="en-US" sz="1400" dirty="0">
                 <a:solidFill>
-                  <a:srgbClr val="E6EDF3"/>
+                  <a:srgbClr val="1F2937"/>
                 </a:solidFill>
                 <a:latin typeface="Calibri" pitchFamily="34" charset="0"/>
                 <a:ea typeface="Calibri" pitchFamily="34" charset="-122"/>
@@ -2825,7 +2767,7 @@
             <a:r>
               <a:rPr lang="en-US" sz="1400" dirty="0">
                 <a:solidFill>
-                  <a:srgbClr val="E6EDF3"/>
+                  <a:srgbClr val="1F2937"/>
                 </a:solidFill>
                 <a:latin typeface="Calibri" pitchFamily="34" charset="0"/>
                 <a:ea typeface="Calibri" pitchFamily="34" charset="-122"/>
@@ -2858,7 +2800,7 @@
           </a:solidFill>
           <a:ln w="12700">
             <a:solidFill>
-              <a:srgbClr val="1E2B45"/>
+              <a:srgbClr val="E8EDF3"/>
             </a:solidFill>
             <a:prstDash val="solid"/>
           </a:ln>
@@ -2947,7 +2889,7 @@
             <a:r>
               <a:rPr lang="en-US" sz="900" dirty="0">
                 <a:solidFill>
-                  <a:srgbClr val="94A3B8"/>
+                  <a:srgbClr val="64748B"/>
                 </a:solidFill>
                 <a:latin typeface="Calibri" pitchFamily="34" charset="0"/>
                 <a:ea typeface="Calibri" pitchFamily="34" charset="-122"/>
@@ -2959,38 +2901,9 @@
           </a:p>
         </p:txBody>
       </p:sp>
-      <p:sp>
-        <p:nvSpPr>
-          <p:cNvPr id="10" name="Shape 7"/>
-          <p:cNvSpPr/>
-          <p:nvPr/>
-        </p:nvSpPr>
-        <p:spPr>
-          <a:xfrm>
-            <a:off x="7772400" y="4590288"/>
-            <a:ext cx="969264" cy="475488"/>
-          </a:xfrm>
-          <a:prstGeom prst="roundRect">
-            <a:avLst>
-              <a:gd name="adj" fmla="val 11538"/>
-            </a:avLst>
-          </a:prstGeom>
-          <a:solidFill>
-            <a:srgbClr val="FFFFFF"/>
-          </a:solidFill>
-          <a:ln/>
-          <a:effectLst>
-            <a:outerShdw sx="100000" sy="100000" kx="0" ky="0" algn="bl" rotWithShape="0" blurRad="101600" dist="38100" dir="5400000">
-              <a:srgbClr val="000000">
-                <a:alpha val="35000"/>
-              </a:srgbClr>
-            </a:outerShdw>
-          </a:effectLst>
-        </p:spPr>
-      </p:sp>
       <p:pic>
         <p:nvPicPr>
-          <p:cNvPr id="11" name="Image 1" descr="/Users/pop7/Library/CloudStorage/OneDrive-MonsterConnectCo.,Ltd/Lecture/KOSEN69 - software-security/slides/pptx/assets/logo-small.png">    </p:cNvPr>
+          <p:cNvPr id="10" name="Image 1" descr="/Users/pop7/Library/CloudStorage/OneDrive-MonsterConnectCo.,Ltd/Lecture/KOSEN69 - software-security/slides/pptx/assets/logo-small.png">    </p:cNvPr>
           <p:cNvPicPr>
             <a:picLocks noChangeAspect="1"/>
           </p:cNvPicPr>
@@ -3004,7 +2917,7 @@
         </p:blipFill>
         <p:spPr>
           <a:xfrm>
-            <a:off x="7872984" y="4681728"/>
+            <a:off x="7882128" y="4700016"/>
             <a:ext cx="768096" cy="356616"/>
           </a:xfrm>
           <a:prstGeom prst="rect">
@@ -3026,7 +2939,7 @@
     <p:bg>
       <p:bgPr>
         <a:solidFill>
-          <a:srgbClr val="0E1726"/>
+          <a:srgbClr val="FFFFFF"/>
         </a:solidFill>
       </p:bgPr>
     </p:bg>
@@ -3063,9 +2976,9 @@
           </a:solidFill>
           <a:ln/>
           <a:effectLst>
-            <a:outerShdw sx="100000" sy="100000" kx="0" ky="0" algn="bl" rotWithShape="0" blurRad="101600" dist="38100" dir="5400000">
+            <a:outerShdw sx="100000" sy="100000" kx="0" ky="0" algn="bl" rotWithShape="0" blurRad="76200" dist="25400" dir="5400000">
               <a:srgbClr val="000000">
-                <a:alpha val="35000"/>
+                <a:alpha val="12000"/>
               </a:srgbClr>
             </a:outerShdw>
           </a:effectLst>
@@ -3122,7 +3035,7 @@
             <a:r>
               <a:rPr lang="en-US" sz="2600" b="1" dirty="0">
                 <a:solidFill>
-                  <a:srgbClr val="E6EDF3"/>
+                  <a:srgbClr val="1F2937"/>
                 </a:solidFill>
                 <a:latin typeface="Arial" pitchFamily="34" charset="0"/>
                 <a:ea typeface="Arial" pitchFamily="34" charset="-122"/>
@@ -3151,13 +3064,13 @@
             </a:avLst>
           </a:prstGeom>
           <a:solidFill>
-            <a:srgbClr val="18243A"/>
+            <a:srgbClr val="F1F5F9"/>
           </a:solidFill>
           <a:ln/>
           <a:effectLst>
-            <a:outerShdw sx="100000" sy="100000" kx="0" ky="0" algn="bl" rotWithShape="0" blurRad="101600" dist="38100" dir="5400000">
+            <a:outerShdw sx="100000" sy="100000" kx="0" ky="0" algn="bl" rotWithShape="0" blurRad="76200" dist="25400" dir="5400000">
               <a:srgbClr val="000000">
-                <a:alpha val="35000"/>
+                <a:alpha val="12000"/>
               </a:srgbClr>
             </a:outerShdw>
           </a:effectLst>
@@ -3194,7 +3107,7 @@
             <a:r>
               <a:rPr lang="en-US" sz="1400" dirty="0">
                 <a:solidFill>
-                  <a:srgbClr val="E6EDF3"/>
+                  <a:srgbClr val="1F2937"/>
                 </a:solidFill>
                 <a:latin typeface="Calibri" pitchFamily="34" charset="0"/>
                 <a:ea typeface="Calibri" pitchFamily="34" charset="-122"/>
@@ -3215,7 +3128,7 @@
             <a:r>
               <a:rPr lang="en-US" sz="1400" dirty="0">
                 <a:solidFill>
-                  <a:srgbClr val="E6EDF3"/>
+                  <a:srgbClr val="1F2937"/>
                 </a:solidFill>
                 <a:latin typeface="Calibri" pitchFamily="34" charset="0"/>
                 <a:ea typeface="Calibri" pitchFamily="34" charset="-122"/>
@@ -3236,7 +3149,7 @@
             <a:r>
               <a:rPr lang="en-US" sz="1400" dirty="0">
                 <a:solidFill>
-                  <a:srgbClr val="E6EDF3"/>
+                  <a:srgbClr val="1F2937"/>
                 </a:solidFill>
                 <a:latin typeface="Calibri" pitchFamily="34" charset="0"/>
                 <a:ea typeface="Calibri" pitchFamily="34" charset="-122"/>
@@ -3275,7 +3188,7 @@
             <a:r>
               <a:rPr lang="en-US" sz="900" dirty="0">
                 <a:solidFill>
-                  <a:srgbClr val="94A3B8"/>
+                  <a:srgbClr val="64748B"/>
                 </a:solidFill>
                 <a:latin typeface="Calibri" pitchFamily="34" charset="0"/>
                 <a:ea typeface="Calibri" pitchFamily="34" charset="-122"/>
@@ -3287,38 +3200,9 @@
           </a:p>
         </p:txBody>
       </p:sp>
-      <p:sp>
-        <p:nvSpPr>
-          <p:cNvPr id="8" name="Shape 5"/>
-          <p:cNvSpPr/>
-          <p:nvPr/>
-        </p:nvSpPr>
-        <p:spPr>
-          <a:xfrm>
-            <a:off x="7772400" y="4590288"/>
-            <a:ext cx="969264" cy="475488"/>
-          </a:xfrm>
-          <a:prstGeom prst="roundRect">
-            <a:avLst>
-              <a:gd name="adj" fmla="val 11538"/>
-            </a:avLst>
-          </a:prstGeom>
-          <a:solidFill>
-            <a:srgbClr val="FFFFFF"/>
-          </a:solidFill>
-          <a:ln/>
-          <a:effectLst>
-            <a:outerShdw sx="100000" sy="100000" kx="0" ky="0" algn="bl" rotWithShape="0" blurRad="101600" dist="38100" dir="5400000">
-              <a:srgbClr val="000000">
-                <a:alpha val="35000"/>
-              </a:srgbClr>
-            </a:outerShdw>
-          </a:effectLst>
-        </p:spPr>
-      </p:sp>
       <p:pic>
         <p:nvPicPr>
-          <p:cNvPr id="9" name="Image 1" descr="/Users/pop7/Library/CloudStorage/OneDrive-MonsterConnectCo.,Ltd/Lecture/KOSEN69 - software-security/slides/pptx/assets/logo-small.png">    </p:cNvPr>
+          <p:cNvPr id="8" name="Image 1" descr="/Users/pop7/Library/CloudStorage/OneDrive-MonsterConnectCo.,Ltd/Lecture/KOSEN69 - software-security/slides/pptx/assets/logo-small.png">    </p:cNvPr>
           <p:cNvPicPr>
             <a:picLocks noChangeAspect="1"/>
           </p:cNvPicPr>
@@ -3332,7 +3216,7 @@
         </p:blipFill>
         <p:spPr>
           <a:xfrm>
-            <a:off x="7872984" y="4681728"/>
+            <a:off x="7882128" y="4700016"/>
             <a:ext cx="768096" cy="356616"/>
           </a:xfrm>
           <a:prstGeom prst="rect">
@@ -3354,7 +3238,7 @@
     <p:bg>
       <p:bgPr>
         <a:solidFill>
-          <a:srgbClr val="0E1726"/>
+          <a:srgbClr val="FFFFFF"/>
         </a:solidFill>
       </p:bgPr>
     </p:bg>
@@ -3391,9 +3275,9 @@
           </a:solidFill>
           <a:ln/>
           <a:effectLst>
-            <a:outerShdw sx="100000" sy="100000" kx="0" ky="0" algn="bl" rotWithShape="0" blurRad="101600" dist="38100" dir="5400000">
+            <a:outerShdw sx="100000" sy="100000" kx="0" ky="0" algn="bl" rotWithShape="0" blurRad="76200" dist="25400" dir="5400000">
               <a:srgbClr val="000000">
-                <a:alpha val="35000"/>
+                <a:alpha val="12000"/>
               </a:srgbClr>
             </a:outerShdw>
           </a:effectLst>
@@ -3450,7 +3334,7 @@
             <a:r>
               <a:rPr lang="en-US" sz="2600" b="1" dirty="0">
                 <a:solidFill>
-                  <a:srgbClr val="E6EDF3"/>
+                  <a:srgbClr val="1F2937"/>
                 </a:solidFill>
                 <a:latin typeface="Arial" pitchFamily="34" charset="0"/>
                 <a:ea typeface="Arial" pitchFamily="34" charset="-122"/>
@@ -3479,13 +3363,13 @@
             </a:avLst>
           </a:prstGeom>
           <a:solidFill>
-            <a:srgbClr val="18243A"/>
+            <a:srgbClr val="F1F5F9"/>
           </a:solidFill>
           <a:ln/>
           <a:effectLst>
-            <a:outerShdw sx="100000" sy="100000" kx="0" ky="0" algn="bl" rotWithShape="0" blurRad="101600" dist="38100" dir="5400000">
+            <a:outerShdw sx="100000" sy="100000" kx="0" ky="0" algn="bl" rotWithShape="0" blurRad="76200" dist="25400" dir="5400000">
               <a:srgbClr val="000000">
-                <a:alpha val="35000"/>
+                <a:alpha val="12000"/>
               </a:srgbClr>
             </a:outerShdw>
           </a:effectLst>
@@ -3522,7 +3406,7 @@
             <a:r>
               <a:rPr lang="en-US" sz="1400" dirty="0">
                 <a:solidFill>
-                  <a:srgbClr val="E6EDF3"/>
+                  <a:srgbClr val="1F2937"/>
                 </a:solidFill>
                 <a:latin typeface="Calibri" pitchFamily="34" charset="0"/>
                 <a:ea typeface="Calibri" pitchFamily="34" charset="-122"/>
@@ -3543,7 +3427,7 @@
             <a:r>
               <a:rPr lang="en-US" sz="1400" dirty="0">
                 <a:solidFill>
-                  <a:srgbClr val="E6EDF3"/>
+                  <a:srgbClr val="1F2937"/>
                 </a:solidFill>
                 <a:latin typeface="Calibri" pitchFamily="34" charset="0"/>
                 <a:ea typeface="Calibri" pitchFamily="34" charset="-122"/>
@@ -3564,7 +3448,7 @@
             <a:r>
               <a:rPr lang="en-US" sz="1400" dirty="0">
                 <a:solidFill>
-                  <a:srgbClr val="E6EDF3"/>
+                  <a:srgbClr val="1F2937"/>
                 </a:solidFill>
                 <a:latin typeface="Calibri" pitchFamily="34" charset="0"/>
                 <a:ea typeface="Calibri" pitchFamily="34" charset="-122"/>
@@ -3585,7 +3469,7 @@
             <a:r>
               <a:rPr lang="en-US" sz="1400" dirty="0">
                 <a:solidFill>
-                  <a:srgbClr val="E6EDF3"/>
+                  <a:srgbClr val="1F2937"/>
                 </a:solidFill>
                 <a:latin typeface="Calibri" pitchFamily="34" charset="0"/>
                 <a:ea typeface="Calibri" pitchFamily="34" charset="-122"/>
@@ -3624,7 +3508,7 @@
             <a:r>
               <a:rPr lang="en-US" sz="900" dirty="0">
                 <a:solidFill>
-                  <a:srgbClr val="94A3B8"/>
+                  <a:srgbClr val="64748B"/>
                 </a:solidFill>
                 <a:latin typeface="Calibri" pitchFamily="34" charset="0"/>
                 <a:ea typeface="Calibri" pitchFamily="34" charset="-122"/>
@@ -3636,38 +3520,9 @@
           </a:p>
         </p:txBody>
       </p:sp>
-      <p:sp>
-        <p:nvSpPr>
-          <p:cNvPr id="8" name="Shape 5"/>
-          <p:cNvSpPr/>
-          <p:nvPr/>
-        </p:nvSpPr>
-        <p:spPr>
-          <a:xfrm>
-            <a:off x="7772400" y="4590288"/>
-            <a:ext cx="969264" cy="475488"/>
-          </a:xfrm>
-          <a:prstGeom prst="roundRect">
-            <a:avLst>
-              <a:gd name="adj" fmla="val 11538"/>
-            </a:avLst>
-          </a:prstGeom>
-          <a:solidFill>
-            <a:srgbClr val="FFFFFF"/>
-          </a:solidFill>
-          <a:ln/>
-          <a:effectLst>
-            <a:outerShdw sx="100000" sy="100000" kx="0" ky="0" algn="bl" rotWithShape="0" blurRad="101600" dist="38100" dir="5400000">
-              <a:srgbClr val="000000">
-                <a:alpha val="35000"/>
-              </a:srgbClr>
-            </a:outerShdw>
-          </a:effectLst>
-        </p:spPr>
-      </p:sp>
       <p:pic>
         <p:nvPicPr>
-          <p:cNvPr id="9" name="Image 1" descr="/Users/pop7/Library/CloudStorage/OneDrive-MonsterConnectCo.,Ltd/Lecture/KOSEN69 - software-security/slides/pptx/assets/logo-small.png">    </p:cNvPr>
+          <p:cNvPr id="8" name="Image 1" descr="/Users/pop7/Library/CloudStorage/OneDrive-MonsterConnectCo.,Ltd/Lecture/KOSEN69 - software-security/slides/pptx/assets/logo-small.png">    </p:cNvPr>
           <p:cNvPicPr>
             <a:picLocks noChangeAspect="1"/>
           </p:cNvPicPr>
@@ -3681,7 +3536,7 @@
         </p:blipFill>
         <p:spPr>
           <a:xfrm>
-            <a:off x="7872984" y="4681728"/>
+            <a:off x="7882128" y="4700016"/>
             <a:ext cx="768096" cy="356616"/>
           </a:xfrm>
           <a:prstGeom prst="rect">
@@ -3703,7 +3558,7 @@
     <p:bg>
       <p:bgPr>
         <a:solidFill>
-          <a:srgbClr val="0E1726"/>
+          <a:srgbClr val="FFFFFF"/>
         </a:solidFill>
       </p:bgPr>
     </p:bg>
@@ -3740,9 +3595,9 @@
           </a:solidFill>
           <a:ln/>
           <a:effectLst>
-            <a:outerShdw sx="100000" sy="100000" kx="0" ky="0" algn="bl" rotWithShape="0" blurRad="101600" dist="38100" dir="5400000">
+            <a:outerShdw sx="100000" sy="100000" kx="0" ky="0" algn="bl" rotWithShape="0" blurRad="76200" dist="25400" dir="5400000">
               <a:srgbClr val="000000">
-                <a:alpha val="35000"/>
+                <a:alpha val="12000"/>
               </a:srgbClr>
             </a:outerShdw>
           </a:effectLst>
@@ -3799,7 +3654,7 @@
             <a:r>
               <a:rPr lang="en-US" sz="2600" b="1" dirty="0">
                 <a:solidFill>
-                  <a:srgbClr val="E6EDF3"/>
+                  <a:srgbClr val="1F2937"/>
                 </a:solidFill>
                 <a:latin typeface="Arial" pitchFamily="34" charset="0"/>
                 <a:ea typeface="Arial" pitchFamily="34" charset="-122"/>
@@ -3828,13 +3683,13 @@
             </a:avLst>
           </a:prstGeom>
           <a:solidFill>
-            <a:srgbClr val="18243A"/>
+            <a:srgbClr val="F1F5F9"/>
           </a:solidFill>
           <a:ln/>
           <a:effectLst>
-            <a:outerShdw sx="100000" sy="100000" kx="0" ky="0" algn="bl" rotWithShape="0" blurRad="101600" dist="38100" dir="5400000">
+            <a:outerShdw sx="100000" sy="100000" kx="0" ky="0" algn="bl" rotWithShape="0" blurRad="76200" dist="25400" dir="5400000">
               <a:srgbClr val="000000">
-                <a:alpha val="35000"/>
+                <a:alpha val="12000"/>
               </a:srgbClr>
             </a:outerShdw>
           </a:effectLst>
@@ -3871,7 +3726,7 @@
             <a:r>
               <a:rPr lang="en-US" sz="1400" dirty="0">
                 <a:solidFill>
-                  <a:srgbClr val="E6EDF3"/>
+                  <a:srgbClr val="1F2937"/>
                 </a:solidFill>
                 <a:latin typeface="Calibri" pitchFamily="34" charset="0"/>
                 <a:ea typeface="Calibri" pitchFamily="34" charset="-122"/>
@@ -3892,7 +3747,7 @@
             <a:r>
               <a:rPr lang="en-US" sz="1400" dirty="0">
                 <a:solidFill>
-                  <a:srgbClr val="E6EDF3"/>
+                  <a:srgbClr val="1F2937"/>
                 </a:solidFill>
                 <a:latin typeface="Calibri" pitchFamily="34" charset="0"/>
                 <a:ea typeface="Calibri" pitchFamily="34" charset="-122"/>
@@ -3913,7 +3768,7 @@
             <a:r>
               <a:rPr lang="en-US" sz="1400" dirty="0">
                 <a:solidFill>
-                  <a:srgbClr val="E6EDF3"/>
+                  <a:srgbClr val="1F2937"/>
                 </a:solidFill>
                 <a:latin typeface="Calibri" pitchFamily="34" charset="0"/>
                 <a:ea typeface="Calibri" pitchFamily="34" charset="-122"/>
@@ -3952,7 +3807,7 @@
             <a:r>
               <a:rPr lang="en-US" sz="900" dirty="0">
                 <a:solidFill>
-                  <a:srgbClr val="94A3B8"/>
+                  <a:srgbClr val="64748B"/>
                 </a:solidFill>
                 <a:latin typeface="Calibri" pitchFamily="34" charset="0"/>
                 <a:ea typeface="Calibri" pitchFamily="34" charset="-122"/>
@@ -3964,38 +3819,9 @@
           </a:p>
         </p:txBody>
       </p:sp>
-      <p:sp>
-        <p:nvSpPr>
-          <p:cNvPr id="8" name="Shape 5"/>
-          <p:cNvSpPr/>
-          <p:nvPr/>
-        </p:nvSpPr>
-        <p:spPr>
-          <a:xfrm>
-            <a:off x="7772400" y="4590288"/>
-            <a:ext cx="969264" cy="475488"/>
-          </a:xfrm>
-          <a:prstGeom prst="roundRect">
-            <a:avLst>
-              <a:gd name="adj" fmla="val 11538"/>
-            </a:avLst>
-          </a:prstGeom>
-          <a:solidFill>
-            <a:srgbClr val="FFFFFF"/>
-          </a:solidFill>
-          <a:ln/>
-          <a:effectLst>
-            <a:outerShdw sx="100000" sy="100000" kx="0" ky="0" algn="bl" rotWithShape="0" blurRad="101600" dist="38100" dir="5400000">
-              <a:srgbClr val="000000">
-                <a:alpha val="35000"/>
-              </a:srgbClr>
-            </a:outerShdw>
-          </a:effectLst>
-        </p:spPr>
-      </p:sp>
       <p:pic>
         <p:nvPicPr>
-          <p:cNvPr id="9" name="Image 1" descr="/Users/pop7/Library/CloudStorage/OneDrive-MonsterConnectCo.,Ltd/Lecture/KOSEN69 - software-security/slides/pptx/assets/logo-small.png">    </p:cNvPr>
+          <p:cNvPr id="8" name="Image 1" descr="/Users/pop7/Library/CloudStorage/OneDrive-MonsterConnectCo.,Ltd/Lecture/KOSEN69 - software-security/slides/pptx/assets/logo-small.png">    </p:cNvPr>
           <p:cNvPicPr>
             <a:picLocks noChangeAspect="1"/>
           </p:cNvPicPr>
@@ -4009,7 +3835,7 @@
         </p:blipFill>
         <p:spPr>
           <a:xfrm>
-            <a:off x="7872984" y="4681728"/>
+            <a:off x="7882128" y="4700016"/>
             <a:ext cx="768096" cy="356616"/>
           </a:xfrm>
           <a:prstGeom prst="rect">
@@ -4031,7 +3857,7 @@
     <p:bg>
       <p:bgPr>
         <a:solidFill>
-          <a:srgbClr val="0E1726"/>
+          <a:srgbClr val="FFFFFF"/>
         </a:solidFill>
       </p:bgPr>
     </p:bg>
@@ -4076,7 +3902,7 @@
             <a:r>
               <a:rPr lang="en-US" sz="4600" b="1" dirty="0">
                 <a:solidFill>
-                  <a:srgbClr val="E6EDF3"/>
+                  <a:srgbClr val="1F2937"/>
                 </a:solidFill>
                 <a:latin typeface="Arial" pitchFamily="34" charset="0"/>
                 <a:ea typeface="Arial" pitchFamily="34" charset="-122"/>
@@ -4127,38 +3953,9 @@
           </a:p>
         </p:txBody>
       </p:sp>
-      <p:sp>
-        <p:nvSpPr>
-          <p:cNvPr id="4" name="Shape 2"/>
-          <p:cNvSpPr/>
-          <p:nvPr/>
-        </p:nvSpPr>
-        <p:spPr>
-          <a:xfrm>
-            <a:off x="7772400" y="4590288"/>
-            <a:ext cx="969264" cy="475488"/>
-          </a:xfrm>
-          <a:prstGeom prst="roundRect">
-            <a:avLst>
-              <a:gd name="adj" fmla="val 11538"/>
-            </a:avLst>
-          </a:prstGeom>
-          <a:solidFill>
-            <a:srgbClr val="FFFFFF"/>
-          </a:solidFill>
-          <a:ln/>
-          <a:effectLst>
-            <a:outerShdw sx="100000" sy="100000" kx="0" ky="0" algn="bl" rotWithShape="0" blurRad="101600" dist="38100" dir="5400000">
-              <a:srgbClr val="000000">
-                <a:alpha val="35000"/>
-              </a:srgbClr>
-            </a:outerShdw>
-          </a:effectLst>
-        </p:spPr>
-      </p:sp>
       <p:pic>
         <p:nvPicPr>
-          <p:cNvPr id="5" name="Image 0" descr="/Users/pop7/Library/CloudStorage/OneDrive-MonsterConnectCo.,Ltd/Lecture/KOSEN69 - software-security/slides/pptx/assets/logo-small.png">    </p:cNvPr>
+          <p:cNvPr id="4" name="Image 0" descr="/Users/pop7/Library/CloudStorage/OneDrive-MonsterConnectCo.,Ltd/Lecture/KOSEN69 - software-security/slides/pptx/assets/logo-small.png">    </p:cNvPr>
           <p:cNvPicPr>
             <a:picLocks noChangeAspect="1"/>
           </p:cNvPicPr>
@@ -4172,7 +3969,7 @@
         </p:blipFill>
         <p:spPr>
           <a:xfrm>
-            <a:off x="7872984" y="4681728"/>
+            <a:off x="7882128" y="4700016"/>
             <a:ext cx="768096" cy="356616"/>
           </a:xfrm>
           <a:prstGeom prst="rect">
@@ -4194,7 +3991,7 @@
     <p:bg>
       <p:bgPr>
         <a:solidFill>
-          <a:srgbClr val="0E1726"/>
+          <a:srgbClr val="FFFFFF"/>
         </a:solidFill>
       </p:bgPr>
     </p:bg>
@@ -4231,9 +4028,9 @@
           </a:solidFill>
           <a:ln/>
           <a:effectLst>
-            <a:outerShdw sx="100000" sy="100000" kx="0" ky="0" algn="bl" rotWithShape="0" blurRad="101600" dist="38100" dir="5400000">
+            <a:outerShdw sx="100000" sy="100000" kx="0" ky="0" algn="bl" rotWithShape="0" blurRad="76200" dist="25400" dir="5400000">
               <a:srgbClr val="000000">
-                <a:alpha val="35000"/>
+                <a:alpha val="12000"/>
               </a:srgbClr>
             </a:outerShdw>
           </a:effectLst>
@@ -4290,7 +4087,7 @@
             <a:r>
               <a:rPr lang="en-US" sz="2600" b="1" dirty="0">
                 <a:solidFill>
-                  <a:srgbClr val="E6EDF3"/>
+                  <a:srgbClr val="1F2937"/>
                 </a:solidFill>
                 <a:latin typeface="Arial" pitchFamily="34" charset="0"/>
                 <a:ea typeface="Arial" pitchFamily="34" charset="-122"/>
@@ -4319,13 +4116,13 @@
             </a:avLst>
           </a:prstGeom>
           <a:solidFill>
-            <a:srgbClr val="18243A"/>
+            <a:srgbClr val="F1F5F9"/>
           </a:solidFill>
           <a:ln/>
           <a:effectLst>
-            <a:outerShdw sx="100000" sy="100000" kx="0" ky="0" algn="bl" rotWithShape="0" blurRad="101600" dist="38100" dir="5400000">
+            <a:outerShdw sx="100000" sy="100000" kx="0" ky="0" algn="bl" rotWithShape="0" blurRad="76200" dist="25400" dir="5400000">
               <a:srgbClr val="000000">
-                <a:alpha val="35000"/>
+                <a:alpha val="12000"/>
               </a:srgbClr>
             </a:outerShdw>
           </a:effectLst>
@@ -4362,7 +4159,7 @@
             <a:r>
               <a:rPr lang="en-US" sz="1400" dirty="0">
                 <a:solidFill>
-                  <a:srgbClr val="E6EDF3"/>
+                  <a:srgbClr val="1F2937"/>
                 </a:solidFill>
                 <a:latin typeface="Calibri" pitchFamily="34" charset="0"/>
                 <a:ea typeface="Calibri" pitchFamily="34" charset="-122"/>
@@ -4383,7 +4180,7 @@
             <a:r>
               <a:rPr lang="en-US" sz="1400" dirty="0">
                 <a:solidFill>
-                  <a:srgbClr val="E6EDF3"/>
+                  <a:srgbClr val="1F2937"/>
                 </a:solidFill>
                 <a:latin typeface="Calibri" pitchFamily="34" charset="0"/>
                 <a:ea typeface="Calibri" pitchFamily="34" charset="-122"/>
@@ -4404,7 +4201,7 @@
             <a:r>
               <a:rPr lang="en-US" sz="1400" dirty="0">
                 <a:solidFill>
-                  <a:srgbClr val="E6EDF3"/>
+                  <a:srgbClr val="1F2937"/>
                 </a:solidFill>
                 <a:latin typeface="Calibri" pitchFamily="34" charset="0"/>
                 <a:ea typeface="Calibri" pitchFamily="34" charset="-122"/>
@@ -4425,7 +4222,7 @@
             <a:r>
               <a:rPr lang="en-US" sz="1400" dirty="0">
                 <a:solidFill>
-                  <a:srgbClr val="E6EDF3"/>
+                  <a:srgbClr val="1F2937"/>
                 </a:solidFill>
                 <a:latin typeface="Calibri" pitchFamily="34" charset="0"/>
                 <a:ea typeface="Calibri" pitchFamily="34" charset="-122"/>
@@ -4464,7 +4261,7 @@
             <a:r>
               <a:rPr lang="en-US" sz="900" dirty="0">
                 <a:solidFill>
-                  <a:srgbClr val="94A3B8"/>
+                  <a:srgbClr val="64748B"/>
                 </a:solidFill>
                 <a:latin typeface="Calibri" pitchFamily="34" charset="0"/>
                 <a:ea typeface="Calibri" pitchFamily="34" charset="-122"/>
@@ -4476,38 +4273,9 @@
           </a:p>
         </p:txBody>
       </p:sp>
-      <p:sp>
-        <p:nvSpPr>
-          <p:cNvPr id="8" name="Shape 5"/>
-          <p:cNvSpPr/>
-          <p:nvPr/>
-        </p:nvSpPr>
-        <p:spPr>
-          <a:xfrm>
-            <a:off x="7772400" y="4590288"/>
-            <a:ext cx="969264" cy="475488"/>
-          </a:xfrm>
-          <a:prstGeom prst="roundRect">
-            <a:avLst>
-              <a:gd name="adj" fmla="val 11538"/>
-            </a:avLst>
-          </a:prstGeom>
-          <a:solidFill>
-            <a:srgbClr val="FFFFFF"/>
-          </a:solidFill>
-          <a:ln/>
-          <a:effectLst>
-            <a:outerShdw sx="100000" sy="100000" kx="0" ky="0" algn="bl" rotWithShape="0" blurRad="101600" dist="38100" dir="5400000">
-              <a:srgbClr val="000000">
-                <a:alpha val="35000"/>
-              </a:srgbClr>
-            </a:outerShdw>
-          </a:effectLst>
-        </p:spPr>
-      </p:sp>
       <p:pic>
         <p:nvPicPr>
-          <p:cNvPr id="9" name="Image 1" descr="/Users/pop7/Library/CloudStorage/OneDrive-MonsterConnectCo.,Ltd/Lecture/KOSEN69 - software-security/slides/pptx/assets/logo-small.png">    </p:cNvPr>
+          <p:cNvPr id="8" name="Image 1" descr="/Users/pop7/Library/CloudStorage/OneDrive-MonsterConnectCo.,Ltd/Lecture/KOSEN69 - software-security/slides/pptx/assets/logo-small.png">    </p:cNvPr>
           <p:cNvPicPr>
             <a:picLocks noChangeAspect="1"/>
           </p:cNvPicPr>
@@ -4521,7 +4289,7 @@
         </p:blipFill>
         <p:spPr>
           <a:xfrm>
-            <a:off x="7872984" y="4681728"/>
+            <a:off x="7882128" y="4700016"/>
             <a:ext cx="768096" cy="356616"/>
           </a:xfrm>
           <a:prstGeom prst="rect">
@@ -4543,7 +4311,7 @@
     <p:bg>
       <p:bgPr>
         <a:solidFill>
-          <a:srgbClr val="0E1726"/>
+          <a:srgbClr val="FFFFFF"/>
         </a:solidFill>
       </p:bgPr>
     </p:bg>
@@ -4580,9 +4348,9 @@
           </a:solidFill>
           <a:ln/>
           <a:effectLst>
-            <a:outerShdw sx="100000" sy="100000" kx="0" ky="0" algn="bl" rotWithShape="0" blurRad="101600" dist="38100" dir="5400000">
+            <a:outerShdw sx="100000" sy="100000" kx="0" ky="0" algn="bl" rotWithShape="0" blurRad="76200" dist="25400" dir="5400000">
               <a:srgbClr val="000000">
-                <a:alpha val="35000"/>
+                <a:alpha val="12000"/>
               </a:srgbClr>
             </a:outerShdw>
           </a:effectLst>
@@ -4639,7 +4407,7 @@
             <a:r>
               <a:rPr lang="en-US" sz="2600" b="1" dirty="0">
                 <a:solidFill>
-                  <a:srgbClr val="E6EDF3"/>
+                  <a:srgbClr val="1F2937"/>
                 </a:solidFill>
                 <a:latin typeface="Arial" pitchFamily="34" charset="0"/>
                 <a:ea typeface="Arial" pitchFamily="34" charset="-122"/>
@@ -4668,13 +4436,13 @@
             </a:avLst>
           </a:prstGeom>
           <a:solidFill>
-            <a:srgbClr val="18243A"/>
+            <a:srgbClr val="F1F5F9"/>
           </a:solidFill>
           <a:ln/>
           <a:effectLst>
-            <a:outerShdw sx="100000" sy="100000" kx="0" ky="0" algn="bl" rotWithShape="0" blurRad="101600" dist="38100" dir="5400000">
+            <a:outerShdw sx="100000" sy="100000" kx="0" ky="0" algn="bl" rotWithShape="0" blurRad="76200" dist="25400" dir="5400000">
               <a:srgbClr val="000000">
-                <a:alpha val="35000"/>
+                <a:alpha val="12000"/>
               </a:srgbClr>
             </a:outerShdw>
           </a:effectLst>
@@ -4711,7 +4479,7 @@
             <a:r>
               <a:rPr lang="en-US" sz="1400" dirty="0">
                 <a:solidFill>
-                  <a:srgbClr val="E6EDF3"/>
+                  <a:srgbClr val="1F2937"/>
                 </a:solidFill>
                 <a:latin typeface="Calibri" pitchFamily="34" charset="0"/>
                 <a:ea typeface="Calibri" pitchFamily="34" charset="-122"/>
@@ -4732,7 +4500,7 @@
             <a:r>
               <a:rPr lang="en-US" sz="1400" dirty="0">
                 <a:solidFill>
-                  <a:srgbClr val="E6EDF3"/>
+                  <a:srgbClr val="1F2937"/>
                 </a:solidFill>
                 <a:latin typeface="Calibri" pitchFamily="34" charset="0"/>
                 <a:ea typeface="Calibri" pitchFamily="34" charset="-122"/>
@@ -4753,7 +4521,7 @@
             <a:r>
               <a:rPr lang="en-US" sz="1400" dirty="0">
                 <a:solidFill>
-                  <a:srgbClr val="E6EDF3"/>
+                  <a:srgbClr val="1F2937"/>
                 </a:solidFill>
                 <a:latin typeface="Calibri" pitchFamily="34" charset="0"/>
                 <a:ea typeface="Calibri" pitchFamily="34" charset="-122"/>
@@ -4792,7 +4560,7 @@
             <a:r>
               <a:rPr lang="en-US" sz="900" dirty="0">
                 <a:solidFill>
-                  <a:srgbClr val="94A3B8"/>
+                  <a:srgbClr val="64748B"/>
                 </a:solidFill>
                 <a:latin typeface="Calibri" pitchFamily="34" charset="0"/>
                 <a:ea typeface="Calibri" pitchFamily="34" charset="-122"/>
@@ -4804,38 +4572,9 @@
           </a:p>
         </p:txBody>
       </p:sp>
-      <p:sp>
-        <p:nvSpPr>
-          <p:cNvPr id="8" name="Shape 5"/>
-          <p:cNvSpPr/>
-          <p:nvPr/>
-        </p:nvSpPr>
-        <p:spPr>
-          <a:xfrm>
-            <a:off x="7772400" y="4590288"/>
-            <a:ext cx="969264" cy="475488"/>
-          </a:xfrm>
-          <a:prstGeom prst="roundRect">
-            <a:avLst>
-              <a:gd name="adj" fmla="val 11538"/>
-            </a:avLst>
-          </a:prstGeom>
-          <a:solidFill>
-            <a:srgbClr val="FFFFFF"/>
-          </a:solidFill>
-          <a:ln/>
-          <a:effectLst>
-            <a:outerShdw sx="100000" sy="100000" kx="0" ky="0" algn="bl" rotWithShape="0" blurRad="101600" dist="38100" dir="5400000">
-              <a:srgbClr val="000000">
-                <a:alpha val="35000"/>
-              </a:srgbClr>
-            </a:outerShdw>
-          </a:effectLst>
-        </p:spPr>
-      </p:sp>
       <p:pic>
         <p:nvPicPr>
-          <p:cNvPr id="9" name="Image 1" descr="/Users/pop7/Library/CloudStorage/OneDrive-MonsterConnectCo.,Ltd/Lecture/KOSEN69 - software-security/slides/pptx/assets/logo-small.png">    </p:cNvPr>
+          <p:cNvPr id="8" name="Image 1" descr="/Users/pop7/Library/CloudStorage/OneDrive-MonsterConnectCo.,Ltd/Lecture/KOSEN69 - software-security/slides/pptx/assets/logo-small.png">    </p:cNvPr>
           <p:cNvPicPr>
             <a:picLocks noChangeAspect="1"/>
           </p:cNvPicPr>
@@ -4849,7 +4588,7 @@
         </p:blipFill>
         <p:spPr>
           <a:xfrm>
-            <a:off x="7872984" y="4681728"/>
+            <a:off x="7882128" y="4700016"/>
             <a:ext cx="768096" cy="356616"/>
           </a:xfrm>
           <a:prstGeom prst="rect">
@@ -4871,7 +4610,7 @@
     <p:bg>
       <p:bgPr>
         <a:solidFill>
-          <a:srgbClr val="0E1726"/>
+          <a:srgbClr val="FFFFFF"/>
         </a:solidFill>
       </p:bgPr>
     </p:bg>
@@ -4908,9 +4647,9 @@
           </a:solidFill>
           <a:ln/>
           <a:effectLst>
-            <a:outerShdw sx="100000" sy="100000" kx="0" ky="0" algn="bl" rotWithShape="0" blurRad="101600" dist="38100" dir="5400000">
+            <a:outerShdw sx="100000" sy="100000" kx="0" ky="0" algn="bl" rotWithShape="0" blurRad="76200" dist="25400" dir="5400000">
               <a:srgbClr val="000000">
-                <a:alpha val="35000"/>
+                <a:alpha val="12000"/>
               </a:srgbClr>
             </a:outerShdw>
           </a:effectLst>
@@ -4967,7 +4706,7 @@
             <a:r>
               <a:rPr lang="en-US" sz="2600" b="1" dirty="0">
                 <a:solidFill>
-                  <a:srgbClr val="E6EDF3"/>
+                  <a:srgbClr val="1F2937"/>
                 </a:solidFill>
                 <a:latin typeface="Arial" pitchFamily="34" charset="0"/>
                 <a:ea typeface="Arial" pitchFamily="34" charset="-122"/>
@@ -5006,7 +4745,7 @@
             <a:r>
               <a:rPr lang="en-US" sz="1400" dirty="0">
                 <a:solidFill>
-                  <a:srgbClr val="E6EDF3"/>
+                  <a:srgbClr val="1F2937"/>
                 </a:solidFill>
                 <a:latin typeface="Calibri" pitchFamily="34" charset="0"/>
                 <a:ea typeface="Calibri" pitchFamily="34" charset="-122"/>
@@ -5035,13 +4774,13 @@
             </a:avLst>
           </a:prstGeom>
           <a:solidFill>
-            <a:srgbClr val="18243A"/>
+            <a:srgbClr val="F1F5F9"/>
           </a:solidFill>
           <a:ln/>
           <a:effectLst>
-            <a:outerShdw sx="100000" sy="100000" kx="0" ky="0" algn="bl" rotWithShape="0" blurRad="101600" dist="38100" dir="5400000">
+            <a:outerShdw sx="100000" sy="100000" kx="0" ky="0" algn="bl" rotWithShape="0" blurRad="76200" dist="25400" dir="5400000">
               <a:srgbClr val="000000">
-                <a:alpha val="35000"/>
+                <a:alpha val="12000"/>
               </a:srgbClr>
             </a:outerShdw>
           </a:effectLst>
@@ -5078,7 +4817,7 @@
             <a:r>
               <a:rPr lang="en-US" sz="1400" dirty="0">
                 <a:solidFill>
-                  <a:srgbClr val="E6EDF3"/>
+                  <a:srgbClr val="1F2937"/>
                 </a:solidFill>
                 <a:latin typeface="Calibri" pitchFamily="34" charset="0"/>
                 <a:ea typeface="Calibri" pitchFamily="34" charset="-122"/>
@@ -5099,7 +4838,7 @@
             <a:r>
               <a:rPr lang="en-US" sz="1400" dirty="0">
                 <a:solidFill>
-                  <a:srgbClr val="E6EDF3"/>
+                  <a:srgbClr val="1F2937"/>
                 </a:solidFill>
                 <a:latin typeface="Calibri" pitchFamily="34" charset="0"/>
                 <a:ea typeface="Calibri" pitchFamily="34" charset="-122"/>
@@ -5120,7 +4859,7 @@
             <a:r>
               <a:rPr lang="en-US" sz="1400" dirty="0">
                 <a:solidFill>
-                  <a:srgbClr val="E6EDF3"/>
+                  <a:srgbClr val="1F2937"/>
                 </a:solidFill>
                 <a:latin typeface="Calibri" pitchFamily="34" charset="0"/>
                 <a:ea typeface="Calibri" pitchFamily="34" charset="-122"/>
@@ -5159,7 +4898,7 @@
             <a:r>
               <a:rPr lang="en-US" sz="900" dirty="0">
                 <a:solidFill>
-                  <a:srgbClr val="94A3B8"/>
+                  <a:srgbClr val="64748B"/>
                 </a:solidFill>
                 <a:latin typeface="Calibri" pitchFamily="34" charset="0"/>
                 <a:ea typeface="Calibri" pitchFamily="34" charset="-122"/>
@@ -5171,38 +4910,9 @@
           </a:p>
         </p:txBody>
       </p:sp>
-      <p:sp>
-        <p:nvSpPr>
-          <p:cNvPr id="9" name="Shape 6"/>
-          <p:cNvSpPr/>
-          <p:nvPr/>
-        </p:nvSpPr>
-        <p:spPr>
-          <a:xfrm>
-            <a:off x="7772400" y="4590288"/>
-            <a:ext cx="969264" cy="475488"/>
-          </a:xfrm>
-          <a:prstGeom prst="roundRect">
-            <a:avLst>
-              <a:gd name="adj" fmla="val 11538"/>
-            </a:avLst>
-          </a:prstGeom>
-          <a:solidFill>
-            <a:srgbClr val="FFFFFF"/>
-          </a:solidFill>
-          <a:ln/>
-          <a:effectLst>
-            <a:outerShdw sx="100000" sy="100000" kx="0" ky="0" algn="bl" rotWithShape="0" blurRad="101600" dist="38100" dir="5400000">
-              <a:srgbClr val="000000">
-                <a:alpha val="35000"/>
-              </a:srgbClr>
-            </a:outerShdw>
-          </a:effectLst>
-        </p:spPr>
-      </p:sp>
       <p:pic>
         <p:nvPicPr>
-          <p:cNvPr id="10" name="Image 1" descr="/Users/pop7/Library/CloudStorage/OneDrive-MonsterConnectCo.,Ltd/Lecture/KOSEN69 - software-security/slides/pptx/assets/logo-small.png">    </p:cNvPr>
+          <p:cNvPr id="9" name="Image 1" descr="/Users/pop7/Library/CloudStorage/OneDrive-MonsterConnectCo.,Ltd/Lecture/KOSEN69 - software-security/slides/pptx/assets/logo-small.png">    </p:cNvPr>
           <p:cNvPicPr>
             <a:picLocks noChangeAspect="1"/>
           </p:cNvPicPr>
@@ -5216,7 +4926,7 @@
         </p:blipFill>
         <p:spPr>
           <a:xfrm>
-            <a:off x="7872984" y="4681728"/>
+            <a:off x="7882128" y="4700016"/>
             <a:ext cx="768096" cy="356616"/>
           </a:xfrm>
           <a:prstGeom prst="rect">
@@ -5238,7 +4948,7 @@
     <p:bg>
       <p:bgPr>
         <a:solidFill>
-          <a:srgbClr val="0E1726"/>
+          <a:srgbClr val="FFFFFF"/>
         </a:solidFill>
       </p:bgPr>
     </p:bg>
@@ -5275,9 +4985,9 @@
           </a:solidFill>
           <a:ln/>
           <a:effectLst>
-            <a:outerShdw sx="100000" sy="100000" kx="0" ky="0" algn="bl" rotWithShape="0" blurRad="101600" dist="38100" dir="5400000">
+            <a:outerShdw sx="100000" sy="100000" kx="0" ky="0" algn="bl" rotWithShape="0" blurRad="76200" dist="25400" dir="5400000">
               <a:srgbClr val="000000">
-                <a:alpha val="35000"/>
+                <a:alpha val="12000"/>
               </a:srgbClr>
             </a:outerShdw>
           </a:effectLst>
@@ -5334,7 +5044,7 @@
             <a:r>
               <a:rPr lang="en-US" sz="2600" b="1" dirty="0">
                 <a:solidFill>
-                  <a:srgbClr val="E6EDF3"/>
+                  <a:srgbClr val="1F2937"/>
                 </a:solidFill>
                 <a:latin typeface="Arial" pitchFamily="34" charset="0"/>
                 <a:ea typeface="Arial" pitchFamily="34" charset="-122"/>
@@ -5396,7 +5106,7 @@
                   <a:tcPr marL="76200" marR="76200" marT="38100" marB="38100" anchor="ctr">
                     <a:lnL w="12700" cap="flat" cmpd="sng" algn="ctr">
                       <a:solidFill>
-                        <a:srgbClr val="0E1726"/>
+                        <a:srgbClr val="FFFFFF"/>
                       </a:solidFill>
                       <a:prstDash val="solid"/>
                       <a:round/>
@@ -5405,7 +5115,7 @@
                     </a:lnL>
                     <a:lnR w="12700" cap="flat" cmpd="sng" algn="ctr">
                       <a:solidFill>
-                        <a:srgbClr val="0E1726"/>
+                        <a:srgbClr val="FFFFFF"/>
                       </a:solidFill>
                       <a:prstDash val="solid"/>
                       <a:round/>
@@ -5414,7 +5124,7 @@
                     </a:lnR>
                     <a:lnT w="12700" cap="flat" cmpd="sng" algn="ctr">
                       <a:solidFill>
-                        <a:srgbClr val="0E1726"/>
+                        <a:srgbClr val="FFFFFF"/>
                       </a:solidFill>
                       <a:prstDash val="solid"/>
                       <a:round/>
@@ -5423,7 +5133,7 @@
                     </a:lnT>
                     <a:lnB w="12700" cap="flat" cmpd="sng" algn="ctr">
                       <a:solidFill>
-                        <a:srgbClr val="0E1726"/>
+                        <a:srgbClr val="FFFFFF"/>
                       </a:solidFill>
                       <a:prstDash val="solid"/>
                       <a:round/>
@@ -5457,7 +5167,7 @@
                   <a:tcPr marL="76200" marR="76200" marT="38100" marB="38100" anchor="ctr">
                     <a:lnL w="12700" cap="flat" cmpd="sng" algn="ctr">
                       <a:solidFill>
-                        <a:srgbClr val="0E1726"/>
+                        <a:srgbClr val="FFFFFF"/>
                       </a:solidFill>
                       <a:prstDash val="solid"/>
                       <a:round/>
@@ -5466,7 +5176,7 @@
                     </a:lnL>
                     <a:lnR w="12700" cap="flat" cmpd="sng" algn="ctr">
                       <a:solidFill>
-                        <a:srgbClr val="0E1726"/>
+                        <a:srgbClr val="FFFFFF"/>
                       </a:solidFill>
                       <a:prstDash val="solid"/>
                       <a:round/>
@@ -5475,7 +5185,7 @@
                     </a:lnR>
                     <a:lnT w="12700" cap="flat" cmpd="sng" algn="ctr">
                       <a:solidFill>
-                        <a:srgbClr val="0E1726"/>
+                        <a:srgbClr val="FFFFFF"/>
                       </a:solidFill>
                       <a:prstDash val="solid"/>
                       <a:round/>
@@ -5484,7 +5194,7 @@
                     </a:lnT>
                     <a:lnB w="12700" cap="flat" cmpd="sng" algn="ctr">
                       <a:solidFill>
-                        <a:srgbClr val="0E1726"/>
+                        <a:srgbClr val="FFFFFF"/>
                       </a:solidFill>
                       <a:prstDash val="solid"/>
                       <a:round/>
@@ -5518,7 +5228,7 @@
                   <a:tcPr marL="76200" marR="76200" marT="38100" marB="38100" anchor="ctr">
                     <a:lnL w="12700" cap="flat" cmpd="sng" algn="ctr">
                       <a:solidFill>
-                        <a:srgbClr val="0E1726"/>
+                        <a:srgbClr val="FFFFFF"/>
                       </a:solidFill>
                       <a:prstDash val="solid"/>
                       <a:round/>
@@ -5527,7 +5237,7 @@
                     </a:lnL>
                     <a:lnR w="12700" cap="flat" cmpd="sng" algn="ctr">
                       <a:solidFill>
-                        <a:srgbClr val="0E1726"/>
+                        <a:srgbClr val="FFFFFF"/>
                       </a:solidFill>
                       <a:prstDash val="solid"/>
                       <a:round/>
@@ -5536,7 +5246,7 @@
                     </a:lnR>
                     <a:lnT w="12700" cap="flat" cmpd="sng" algn="ctr">
                       <a:solidFill>
-                        <a:srgbClr val="0E1726"/>
+                        <a:srgbClr val="FFFFFF"/>
                       </a:solidFill>
                       <a:prstDash val="solid"/>
                       <a:round/>
@@ -5545,7 +5255,7 @@
                     </a:lnT>
                     <a:lnB w="12700" cap="flat" cmpd="sng" algn="ctr">
                       <a:solidFill>
-                        <a:srgbClr val="0E1726"/>
+                        <a:srgbClr val="FFFFFF"/>
                       </a:solidFill>
                       <a:prstDash val="solid"/>
                       <a:round/>
@@ -5570,7 +5280,7 @@
                       <a:r>
                         <a:rPr lang="en-US" sz="1200" dirty="0">
                           <a:solidFill>
-                            <a:srgbClr val="E6EDF3"/>
+                            <a:srgbClr val="1F2937"/>
                           </a:solidFill>
                         </a:rPr>
                         <a:t>SAST</a:t>
@@ -5581,7 +5291,7 @@
                   <a:tcPr marL="76200" marR="76200" marT="38100" marB="38100" anchor="ctr">
                     <a:lnL w="12700" cap="flat" cmpd="sng" algn="ctr">
                       <a:solidFill>
-                        <a:srgbClr val="0E1726"/>
+                        <a:srgbClr val="FFFFFF"/>
                       </a:solidFill>
                       <a:prstDash val="solid"/>
                       <a:round/>
@@ -5590,7 +5300,7 @@
                     </a:lnL>
                     <a:lnR w="12700" cap="flat" cmpd="sng" algn="ctr">
                       <a:solidFill>
-                        <a:srgbClr val="0E1726"/>
+                        <a:srgbClr val="FFFFFF"/>
                       </a:solidFill>
                       <a:prstDash val="solid"/>
                       <a:round/>
@@ -5599,7 +5309,7 @@
                     </a:lnR>
                     <a:lnT w="12700" cap="flat" cmpd="sng" algn="ctr">
                       <a:solidFill>
-                        <a:srgbClr val="0E1726"/>
+                        <a:srgbClr val="FFFFFF"/>
                       </a:solidFill>
                       <a:prstDash val="solid"/>
                       <a:round/>
@@ -5608,7 +5318,7 @@
                     </a:lnT>
                     <a:lnB w="12700" cap="flat" cmpd="sng" algn="ctr">
                       <a:solidFill>
-                        <a:srgbClr val="0E1726"/>
+                        <a:srgbClr val="FFFFFF"/>
                       </a:solidFill>
                       <a:prstDash val="solid"/>
                       <a:round/>
@@ -5616,7 +5326,7 @@
                       <a:tailEnd type="none" w="med" len="med"/>
                     </a:lnB>
                     <a:solidFill>
-                      <a:srgbClr val="18243A"/>
+                      <a:srgbClr val="F1F5F9"/>
                     </a:solidFill>
                   </a:tcPr>
                 </a:tc>
@@ -5631,7 +5341,7 @@
                       <a:r>
                         <a:rPr lang="en-US" sz="1200" dirty="0">
                           <a:solidFill>
-                            <a:srgbClr val="E6EDF3"/>
+                            <a:srgbClr val="1F2937"/>
                           </a:solidFill>
                         </a:rPr>
                         <a:t>source code</a:t>
@@ -5642,7 +5352,7 @@
                   <a:tcPr marL="76200" marR="76200" marT="38100" marB="38100" anchor="ctr">
                     <a:lnL w="12700" cap="flat" cmpd="sng" algn="ctr">
                       <a:solidFill>
-                        <a:srgbClr val="0E1726"/>
+                        <a:srgbClr val="FFFFFF"/>
                       </a:solidFill>
                       <a:prstDash val="solid"/>
                       <a:round/>
@@ -5651,7 +5361,7 @@
                     </a:lnL>
                     <a:lnR w="12700" cap="flat" cmpd="sng" algn="ctr">
                       <a:solidFill>
-                        <a:srgbClr val="0E1726"/>
+                        <a:srgbClr val="FFFFFF"/>
                       </a:solidFill>
                       <a:prstDash val="solid"/>
                       <a:round/>
@@ -5660,7 +5370,7 @@
                     </a:lnR>
                     <a:lnT w="12700" cap="flat" cmpd="sng" algn="ctr">
                       <a:solidFill>
-                        <a:srgbClr val="0E1726"/>
+                        <a:srgbClr val="FFFFFF"/>
                       </a:solidFill>
                       <a:prstDash val="solid"/>
                       <a:round/>
@@ -5669,7 +5379,7 @@
                     </a:lnT>
                     <a:lnB w="12700" cap="flat" cmpd="sng" algn="ctr">
                       <a:solidFill>
-                        <a:srgbClr val="0E1726"/>
+                        <a:srgbClr val="FFFFFF"/>
                       </a:solidFill>
                       <a:prstDash val="solid"/>
                       <a:round/>
@@ -5677,7 +5387,7 @@
                       <a:tailEnd type="none" w="med" len="med"/>
                     </a:lnB>
                     <a:solidFill>
-                      <a:srgbClr val="18243A"/>
+                      <a:srgbClr val="F1F5F9"/>
                     </a:solidFill>
                   </a:tcPr>
                 </a:tc>
@@ -5692,7 +5402,7 @@
                       <a:r>
                         <a:rPr lang="en-US" sz="1200" dirty="0">
                           <a:solidFill>
-                            <a:srgbClr val="E6EDF3"/>
+                            <a:srgbClr val="1F2937"/>
                           </a:solidFill>
                         </a:rPr>
                         <a:t>code/commit</a:t>
@@ -5703,7 +5413,7 @@
                   <a:tcPr marL="76200" marR="76200" marT="38100" marB="38100" anchor="ctr">
                     <a:lnL w="12700" cap="flat" cmpd="sng" algn="ctr">
                       <a:solidFill>
-                        <a:srgbClr val="0E1726"/>
+                        <a:srgbClr val="FFFFFF"/>
                       </a:solidFill>
                       <a:prstDash val="solid"/>
                       <a:round/>
@@ -5712,7 +5422,7 @@
                     </a:lnL>
                     <a:lnR w="12700" cap="flat" cmpd="sng" algn="ctr">
                       <a:solidFill>
-                        <a:srgbClr val="0E1726"/>
+                        <a:srgbClr val="FFFFFF"/>
                       </a:solidFill>
                       <a:prstDash val="solid"/>
                       <a:round/>
@@ -5721,7 +5431,7 @@
                     </a:lnR>
                     <a:lnT w="12700" cap="flat" cmpd="sng" algn="ctr">
                       <a:solidFill>
-                        <a:srgbClr val="0E1726"/>
+                        <a:srgbClr val="FFFFFF"/>
                       </a:solidFill>
                       <a:prstDash val="solid"/>
                       <a:round/>
@@ -5730,7 +5440,7 @@
                     </a:lnT>
                     <a:lnB w="12700" cap="flat" cmpd="sng" algn="ctr">
                       <a:solidFill>
-                        <a:srgbClr val="0E1726"/>
+                        <a:srgbClr val="FFFFFF"/>
                       </a:solidFill>
                       <a:prstDash val="solid"/>
                       <a:round/>
@@ -5738,7 +5448,7 @@
                       <a:tailEnd type="none" w="med" len="med"/>
                     </a:lnB>
                     <a:solidFill>
-                      <a:srgbClr val="18243A"/>
+                      <a:srgbClr val="F1F5F9"/>
                     </a:solidFill>
                   </a:tcPr>
                 </a:tc>
@@ -5755,7 +5465,7 @@
                       <a:r>
                         <a:rPr lang="en-US" sz="1200" dirty="0">
                           <a:solidFill>
-                            <a:srgbClr val="E6EDF3"/>
+                            <a:srgbClr val="1F2937"/>
                           </a:solidFill>
                         </a:rPr>
                         <a:t>DAST</a:t>
@@ -5766,7 +5476,7 @@
                   <a:tcPr marL="76200" marR="76200" marT="38100" marB="38100" anchor="ctr">
                     <a:lnL w="12700" cap="flat" cmpd="sng" algn="ctr">
                       <a:solidFill>
-                        <a:srgbClr val="0E1726"/>
+                        <a:srgbClr val="FFFFFF"/>
                       </a:solidFill>
                       <a:prstDash val="solid"/>
                       <a:round/>
@@ -5775,7 +5485,7 @@
                     </a:lnL>
                     <a:lnR w="12700" cap="flat" cmpd="sng" algn="ctr">
                       <a:solidFill>
-                        <a:srgbClr val="0E1726"/>
+                        <a:srgbClr val="FFFFFF"/>
                       </a:solidFill>
                       <a:prstDash val="solid"/>
                       <a:round/>
@@ -5784,7 +5494,7 @@
                     </a:lnR>
                     <a:lnT w="12700" cap="flat" cmpd="sng" algn="ctr">
                       <a:solidFill>
-                        <a:srgbClr val="0E1726"/>
+                        <a:srgbClr val="FFFFFF"/>
                       </a:solidFill>
                       <a:prstDash val="solid"/>
                       <a:round/>
@@ -5793,7 +5503,7 @@
                     </a:lnT>
                     <a:lnB w="12700" cap="flat" cmpd="sng" algn="ctr">
                       <a:solidFill>
-                        <a:srgbClr val="0E1726"/>
+                        <a:srgbClr val="FFFFFF"/>
                       </a:solidFill>
                       <a:prstDash val="solid"/>
                       <a:round/>
@@ -5801,7 +5511,7 @@
                       <a:tailEnd type="none" w="med" len="med"/>
                     </a:lnB>
                     <a:solidFill>
-                      <a:srgbClr val="1E2B45"/>
+                      <a:srgbClr val="E8EDF3"/>
                     </a:solidFill>
                   </a:tcPr>
                 </a:tc>
@@ -5816,7 +5526,7 @@
                       <a:r>
                         <a:rPr lang="en-US" sz="1200" dirty="0">
                           <a:solidFill>
-                            <a:srgbClr val="E6EDF3"/>
+                            <a:srgbClr val="1F2937"/>
                           </a:solidFill>
                         </a:rPr>
                         <a:t>running app</a:t>
@@ -5827,7 +5537,7 @@
                   <a:tcPr marL="76200" marR="76200" marT="38100" marB="38100" anchor="ctr">
                     <a:lnL w="12700" cap="flat" cmpd="sng" algn="ctr">
                       <a:solidFill>
-                        <a:srgbClr val="0E1726"/>
+                        <a:srgbClr val="FFFFFF"/>
                       </a:solidFill>
                       <a:prstDash val="solid"/>
                       <a:round/>
@@ -5836,7 +5546,7 @@
                     </a:lnL>
                     <a:lnR w="12700" cap="flat" cmpd="sng" algn="ctr">
                       <a:solidFill>
-                        <a:srgbClr val="0E1726"/>
+                        <a:srgbClr val="FFFFFF"/>
                       </a:solidFill>
                       <a:prstDash val="solid"/>
                       <a:round/>
@@ -5845,7 +5555,7 @@
                     </a:lnR>
                     <a:lnT w="12700" cap="flat" cmpd="sng" algn="ctr">
                       <a:solidFill>
-                        <a:srgbClr val="0E1726"/>
+                        <a:srgbClr val="FFFFFF"/>
                       </a:solidFill>
                       <a:prstDash val="solid"/>
                       <a:round/>
@@ -5854,7 +5564,7 @@
                     </a:lnT>
                     <a:lnB w="12700" cap="flat" cmpd="sng" algn="ctr">
                       <a:solidFill>
-                        <a:srgbClr val="0E1726"/>
+                        <a:srgbClr val="FFFFFF"/>
                       </a:solidFill>
                       <a:prstDash val="solid"/>
                       <a:round/>
@@ -5862,7 +5572,7 @@
                       <a:tailEnd type="none" w="med" len="med"/>
                     </a:lnB>
                     <a:solidFill>
-                      <a:srgbClr val="1E2B45"/>
+                      <a:srgbClr val="E8EDF3"/>
                     </a:solidFill>
                   </a:tcPr>
                 </a:tc>
@@ -5877,7 +5587,7 @@
                       <a:r>
                         <a:rPr lang="en-US" sz="1200" dirty="0">
                           <a:solidFill>
-                            <a:srgbClr val="E6EDF3"/>
+                            <a:srgbClr val="1F2937"/>
                           </a:solidFill>
                         </a:rPr>
                         <a:t>test/staging</a:t>
@@ -5888,7 +5598,7 @@
                   <a:tcPr marL="76200" marR="76200" marT="38100" marB="38100" anchor="ctr">
                     <a:lnL w="12700" cap="flat" cmpd="sng" algn="ctr">
                       <a:solidFill>
-                        <a:srgbClr val="0E1726"/>
+                        <a:srgbClr val="FFFFFF"/>
                       </a:solidFill>
                       <a:prstDash val="solid"/>
                       <a:round/>
@@ -5897,7 +5607,7 @@
                     </a:lnL>
                     <a:lnR w="12700" cap="flat" cmpd="sng" algn="ctr">
                       <a:solidFill>
-                        <a:srgbClr val="0E1726"/>
+                        <a:srgbClr val="FFFFFF"/>
                       </a:solidFill>
                       <a:prstDash val="solid"/>
                       <a:round/>
@@ -5906,7 +5616,7 @@
                     </a:lnR>
                     <a:lnT w="12700" cap="flat" cmpd="sng" algn="ctr">
                       <a:solidFill>
-                        <a:srgbClr val="0E1726"/>
+                        <a:srgbClr val="FFFFFF"/>
                       </a:solidFill>
                       <a:prstDash val="solid"/>
                       <a:round/>
@@ -5915,7 +5625,7 @@
                     </a:lnT>
                     <a:lnB w="12700" cap="flat" cmpd="sng" algn="ctr">
                       <a:solidFill>
-                        <a:srgbClr val="0E1726"/>
+                        <a:srgbClr val="FFFFFF"/>
                       </a:solidFill>
                       <a:prstDash val="solid"/>
                       <a:round/>
@@ -5923,7 +5633,7 @@
                       <a:tailEnd type="none" w="med" len="med"/>
                     </a:lnB>
                     <a:solidFill>
-                      <a:srgbClr val="1E2B45"/>
+                      <a:srgbClr val="E8EDF3"/>
                     </a:solidFill>
                   </a:tcPr>
                 </a:tc>
@@ -5940,7 +5650,7 @@
                       <a:r>
                         <a:rPr lang="en-US" sz="1200" dirty="0">
                           <a:solidFill>
-                            <a:srgbClr val="E6EDF3"/>
+                            <a:srgbClr val="1F2937"/>
                           </a:solidFill>
                         </a:rPr>
                         <a:t>SCA</a:t>
@@ -5951,7 +5661,7 @@
                   <a:tcPr marL="76200" marR="76200" marT="38100" marB="38100" anchor="ctr">
                     <a:lnL w="12700" cap="flat" cmpd="sng" algn="ctr">
                       <a:solidFill>
-                        <a:srgbClr val="0E1726"/>
+                        <a:srgbClr val="FFFFFF"/>
                       </a:solidFill>
                       <a:prstDash val="solid"/>
                       <a:round/>
@@ -5960,7 +5670,7 @@
                     </a:lnL>
                     <a:lnR w="12700" cap="flat" cmpd="sng" algn="ctr">
                       <a:solidFill>
-                        <a:srgbClr val="0E1726"/>
+                        <a:srgbClr val="FFFFFF"/>
                       </a:solidFill>
                       <a:prstDash val="solid"/>
                       <a:round/>
@@ -5969,7 +5679,7 @@
                     </a:lnR>
                     <a:lnT w="12700" cap="flat" cmpd="sng" algn="ctr">
                       <a:solidFill>
-                        <a:srgbClr val="0E1726"/>
+                        <a:srgbClr val="FFFFFF"/>
                       </a:solidFill>
                       <a:prstDash val="solid"/>
                       <a:round/>
@@ -5978,7 +5688,7 @@
                     </a:lnT>
                     <a:lnB w="12700" cap="flat" cmpd="sng" algn="ctr">
                       <a:solidFill>
-                        <a:srgbClr val="0E1726"/>
+                        <a:srgbClr val="FFFFFF"/>
                       </a:solidFill>
                       <a:prstDash val="solid"/>
                       <a:round/>
@@ -5986,7 +5696,7 @@
                       <a:tailEnd type="none" w="med" len="med"/>
                     </a:lnB>
                     <a:solidFill>
-                      <a:srgbClr val="18243A"/>
+                      <a:srgbClr val="F1F5F9"/>
                     </a:solidFill>
                   </a:tcPr>
                 </a:tc>
@@ -6001,7 +5711,7 @@
                       <a:r>
                         <a:rPr lang="en-US" sz="1200" dirty="0">
                           <a:solidFill>
-                            <a:srgbClr val="E6EDF3"/>
+                            <a:srgbClr val="1F2937"/>
                           </a:solidFill>
                         </a:rPr>
                         <a:t>dependencies</a:t>
@@ -6012,7 +5722,7 @@
                   <a:tcPr marL="76200" marR="76200" marT="38100" marB="38100" anchor="ctr">
                     <a:lnL w="12700" cap="flat" cmpd="sng" algn="ctr">
                       <a:solidFill>
-                        <a:srgbClr val="0E1726"/>
+                        <a:srgbClr val="FFFFFF"/>
                       </a:solidFill>
                       <a:prstDash val="solid"/>
                       <a:round/>
@@ -6021,7 +5731,7 @@
                     </a:lnL>
                     <a:lnR w="12700" cap="flat" cmpd="sng" algn="ctr">
                       <a:solidFill>
-                        <a:srgbClr val="0E1726"/>
+                        <a:srgbClr val="FFFFFF"/>
                       </a:solidFill>
                       <a:prstDash val="solid"/>
                       <a:round/>
@@ -6030,7 +5740,7 @@
                     </a:lnR>
                     <a:lnT w="12700" cap="flat" cmpd="sng" algn="ctr">
                       <a:solidFill>
-                        <a:srgbClr val="0E1726"/>
+                        <a:srgbClr val="FFFFFF"/>
                       </a:solidFill>
                       <a:prstDash val="solid"/>
                       <a:round/>
@@ -6039,7 +5749,7 @@
                     </a:lnT>
                     <a:lnB w="12700" cap="flat" cmpd="sng" algn="ctr">
                       <a:solidFill>
-                        <a:srgbClr val="0E1726"/>
+                        <a:srgbClr val="FFFFFF"/>
                       </a:solidFill>
                       <a:prstDash val="solid"/>
                       <a:round/>
@@ -6047,7 +5757,7 @@
                       <a:tailEnd type="none" w="med" len="med"/>
                     </a:lnB>
                     <a:solidFill>
-                      <a:srgbClr val="18243A"/>
+                      <a:srgbClr val="F1F5F9"/>
                     </a:solidFill>
                   </a:tcPr>
                 </a:tc>
@@ -6062,7 +5772,7 @@
                       <a:r>
                         <a:rPr lang="en-US" sz="1200" dirty="0">
                           <a:solidFill>
-                            <a:srgbClr val="E6EDF3"/>
+                            <a:srgbClr val="1F2937"/>
                           </a:solidFill>
                         </a:rPr>
                         <a:t>build</a:t>
@@ -6073,7 +5783,7 @@
                   <a:tcPr marL="76200" marR="76200" marT="38100" marB="38100" anchor="ctr">
                     <a:lnL w="12700" cap="flat" cmpd="sng" algn="ctr">
                       <a:solidFill>
-                        <a:srgbClr val="0E1726"/>
+                        <a:srgbClr val="FFFFFF"/>
                       </a:solidFill>
                       <a:prstDash val="solid"/>
                       <a:round/>
@@ -6082,7 +5792,7 @@
                     </a:lnL>
                     <a:lnR w="12700" cap="flat" cmpd="sng" algn="ctr">
                       <a:solidFill>
-                        <a:srgbClr val="0E1726"/>
+                        <a:srgbClr val="FFFFFF"/>
                       </a:solidFill>
                       <a:prstDash val="solid"/>
                       <a:round/>
@@ -6091,7 +5801,7 @@
                     </a:lnR>
                     <a:lnT w="12700" cap="flat" cmpd="sng" algn="ctr">
                       <a:solidFill>
-                        <a:srgbClr val="0E1726"/>
+                        <a:srgbClr val="FFFFFF"/>
                       </a:solidFill>
                       <a:prstDash val="solid"/>
                       <a:round/>
@@ -6100,7 +5810,7 @@
                     </a:lnT>
                     <a:lnB w="12700" cap="flat" cmpd="sng" algn="ctr">
                       <a:solidFill>
-                        <a:srgbClr val="0E1726"/>
+                        <a:srgbClr val="FFFFFF"/>
                       </a:solidFill>
                       <a:prstDash val="solid"/>
                       <a:round/>
@@ -6108,7 +5818,7 @@
                       <a:tailEnd type="none" w="med" len="med"/>
                     </a:lnB>
                     <a:solidFill>
-                      <a:srgbClr val="18243A"/>
+                      <a:srgbClr val="F1F5F9"/>
                     </a:solidFill>
                   </a:tcPr>
                 </a:tc>
@@ -6125,7 +5835,7 @@
                       <a:r>
                         <a:rPr lang="en-US" sz="1200" dirty="0">
                           <a:solidFill>
-                            <a:srgbClr val="E6EDF3"/>
+                            <a:srgbClr val="1F2937"/>
                           </a:solidFill>
                         </a:rPr>
                         <a:t>Secret scanning</a:t>
@@ -6136,7 +5846,7 @@
                   <a:tcPr marL="76200" marR="76200" marT="38100" marB="38100" anchor="ctr">
                     <a:lnL w="12700" cap="flat" cmpd="sng" algn="ctr">
                       <a:solidFill>
-                        <a:srgbClr val="0E1726"/>
+                        <a:srgbClr val="FFFFFF"/>
                       </a:solidFill>
                       <a:prstDash val="solid"/>
                       <a:round/>
@@ -6145,7 +5855,7 @@
                     </a:lnL>
                     <a:lnR w="12700" cap="flat" cmpd="sng" algn="ctr">
                       <a:solidFill>
-                        <a:srgbClr val="0E1726"/>
+                        <a:srgbClr val="FFFFFF"/>
                       </a:solidFill>
                       <a:prstDash val="solid"/>
                       <a:round/>
@@ -6154,7 +5864,7 @@
                     </a:lnR>
                     <a:lnT w="12700" cap="flat" cmpd="sng" algn="ctr">
                       <a:solidFill>
-                        <a:srgbClr val="0E1726"/>
+                        <a:srgbClr val="FFFFFF"/>
                       </a:solidFill>
                       <a:prstDash val="solid"/>
                       <a:round/>
@@ -6163,7 +5873,7 @@
                     </a:lnT>
                     <a:lnB w="12700" cap="flat" cmpd="sng" algn="ctr">
                       <a:solidFill>
-                        <a:srgbClr val="0E1726"/>
+                        <a:srgbClr val="FFFFFF"/>
                       </a:solidFill>
                       <a:prstDash val="solid"/>
                       <a:round/>
@@ -6171,7 +5881,7 @@
                       <a:tailEnd type="none" w="med" len="med"/>
                     </a:lnB>
                     <a:solidFill>
-                      <a:srgbClr val="1E2B45"/>
+                      <a:srgbClr val="E8EDF3"/>
                     </a:solidFill>
                   </a:tcPr>
                 </a:tc>
@@ -6186,7 +5896,7 @@
                       <a:r>
                         <a:rPr lang="en-US" sz="1200" dirty="0">
                           <a:solidFill>
-                            <a:srgbClr val="E6EDF3"/>
+                            <a:srgbClr val="1F2937"/>
                           </a:solidFill>
                         </a:rPr>
                         <a:t>secrets in code/history</a:t>
@@ -6197,7 +5907,7 @@
                   <a:tcPr marL="76200" marR="76200" marT="38100" marB="38100" anchor="ctr">
                     <a:lnL w="12700" cap="flat" cmpd="sng" algn="ctr">
                       <a:solidFill>
-                        <a:srgbClr val="0E1726"/>
+                        <a:srgbClr val="FFFFFF"/>
                       </a:solidFill>
                       <a:prstDash val="solid"/>
                       <a:round/>
@@ -6206,7 +5916,7 @@
                     </a:lnL>
                     <a:lnR w="12700" cap="flat" cmpd="sng" algn="ctr">
                       <a:solidFill>
-                        <a:srgbClr val="0E1726"/>
+                        <a:srgbClr val="FFFFFF"/>
                       </a:solidFill>
                       <a:prstDash val="solid"/>
                       <a:round/>
@@ -6215,7 +5925,7 @@
                     </a:lnR>
                     <a:lnT w="12700" cap="flat" cmpd="sng" algn="ctr">
                       <a:solidFill>
-                        <a:srgbClr val="0E1726"/>
+                        <a:srgbClr val="FFFFFF"/>
                       </a:solidFill>
                       <a:prstDash val="solid"/>
                       <a:round/>
@@ -6224,7 +5934,7 @@
                     </a:lnT>
                     <a:lnB w="12700" cap="flat" cmpd="sng" algn="ctr">
                       <a:solidFill>
-                        <a:srgbClr val="0E1726"/>
+                        <a:srgbClr val="FFFFFF"/>
                       </a:solidFill>
                       <a:prstDash val="solid"/>
                       <a:round/>
@@ -6232,7 +5942,7 @@
                       <a:tailEnd type="none" w="med" len="med"/>
                     </a:lnB>
                     <a:solidFill>
-                      <a:srgbClr val="1E2B45"/>
+                      <a:srgbClr val="E8EDF3"/>
                     </a:solidFill>
                   </a:tcPr>
                 </a:tc>
@@ -6247,7 +5957,7 @@
                       <a:r>
                         <a:rPr lang="en-US" sz="1200" dirty="0">
                           <a:solidFill>
-                            <a:srgbClr val="E6EDF3"/>
+                            <a:srgbClr val="1F2937"/>
                           </a:solidFill>
                         </a:rPr>
                         <a:t>commit/CI</a:t>
@@ -6258,7 +5968,7 @@
                   <a:tcPr marL="76200" marR="76200" marT="38100" marB="38100" anchor="ctr">
                     <a:lnL w="12700" cap="flat" cmpd="sng" algn="ctr">
                       <a:solidFill>
-                        <a:srgbClr val="0E1726"/>
+                        <a:srgbClr val="FFFFFF"/>
                       </a:solidFill>
                       <a:prstDash val="solid"/>
                       <a:round/>
@@ -6267,7 +5977,7 @@
                     </a:lnL>
                     <a:lnR w="12700" cap="flat" cmpd="sng" algn="ctr">
                       <a:solidFill>
-                        <a:srgbClr val="0E1726"/>
+                        <a:srgbClr val="FFFFFF"/>
                       </a:solidFill>
                       <a:prstDash val="solid"/>
                       <a:round/>
@@ -6276,7 +5986,7 @@
                     </a:lnR>
                     <a:lnT w="12700" cap="flat" cmpd="sng" algn="ctr">
                       <a:solidFill>
-                        <a:srgbClr val="0E1726"/>
+                        <a:srgbClr val="FFFFFF"/>
                       </a:solidFill>
                       <a:prstDash val="solid"/>
                       <a:round/>
@@ -6285,7 +5995,7 @@
                     </a:lnT>
                     <a:lnB w="12700" cap="flat" cmpd="sng" algn="ctr">
                       <a:solidFill>
-                        <a:srgbClr val="0E1726"/>
+                        <a:srgbClr val="FFFFFF"/>
                       </a:solidFill>
                       <a:prstDash val="solid"/>
                       <a:round/>
@@ -6293,7 +6003,7 @@
                       <a:tailEnd type="none" w="med" len="med"/>
                     </a:lnB>
                     <a:solidFill>
-                      <a:srgbClr val="1E2B45"/>
+                      <a:srgbClr val="E8EDF3"/>
                     </a:solidFill>
                   </a:tcPr>
                 </a:tc>
@@ -6310,7 +6020,7 @@
                       <a:r>
                         <a:rPr lang="en-US" sz="1200" dirty="0">
                           <a:solidFill>
-                            <a:srgbClr val="E6EDF3"/>
+                            <a:srgbClr val="1F2937"/>
                           </a:solidFill>
                         </a:rPr>
                         <a:t>Fuzzing</a:t>
@@ -6321,7 +6031,7 @@
                   <a:tcPr marL="76200" marR="76200" marT="38100" marB="38100" anchor="ctr">
                     <a:lnL w="12700" cap="flat" cmpd="sng" algn="ctr">
                       <a:solidFill>
-                        <a:srgbClr val="0E1726"/>
+                        <a:srgbClr val="FFFFFF"/>
                       </a:solidFill>
                       <a:prstDash val="solid"/>
                       <a:round/>
@@ -6330,7 +6040,7 @@
                     </a:lnL>
                     <a:lnR w="12700" cap="flat" cmpd="sng" algn="ctr">
                       <a:solidFill>
-                        <a:srgbClr val="0E1726"/>
+                        <a:srgbClr val="FFFFFF"/>
                       </a:solidFill>
                       <a:prstDash val="solid"/>
                       <a:round/>
@@ -6339,7 +6049,7 @@
                     </a:lnR>
                     <a:lnT w="12700" cap="flat" cmpd="sng" algn="ctr">
                       <a:solidFill>
-                        <a:srgbClr val="0E1726"/>
+                        <a:srgbClr val="FFFFFF"/>
                       </a:solidFill>
                       <a:prstDash val="solid"/>
                       <a:round/>
@@ -6348,7 +6058,7 @@
                     </a:lnT>
                     <a:lnB w="12700" cap="flat" cmpd="sng" algn="ctr">
                       <a:solidFill>
-                        <a:srgbClr val="0E1726"/>
+                        <a:srgbClr val="FFFFFF"/>
                       </a:solidFill>
                       <a:prstDash val="solid"/>
                       <a:round/>
@@ -6356,7 +6066,7 @@
                       <a:tailEnd type="none" w="med" len="med"/>
                     </a:lnB>
                     <a:solidFill>
-                      <a:srgbClr val="18243A"/>
+                      <a:srgbClr val="F1F5F9"/>
                     </a:solidFill>
                   </a:tcPr>
                 </a:tc>
@@ -6371,7 +6081,7 @@
                       <a:r>
                         <a:rPr lang="en-US" sz="1200" dirty="0">
                           <a:solidFill>
-                            <a:srgbClr val="E6EDF3"/>
+                            <a:srgbClr val="1F2937"/>
                           </a:solidFill>
                         </a:rPr>
                         <a:t>runtime + random inputs</a:t>
@@ -6382,7 +6092,7 @@
                   <a:tcPr marL="76200" marR="76200" marT="38100" marB="38100" anchor="ctr">
                     <a:lnL w="12700" cap="flat" cmpd="sng" algn="ctr">
                       <a:solidFill>
-                        <a:srgbClr val="0E1726"/>
+                        <a:srgbClr val="FFFFFF"/>
                       </a:solidFill>
                       <a:prstDash val="solid"/>
                       <a:round/>
@@ -6391,7 +6101,7 @@
                     </a:lnL>
                     <a:lnR w="12700" cap="flat" cmpd="sng" algn="ctr">
                       <a:solidFill>
-                        <a:srgbClr val="0E1726"/>
+                        <a:srgbClr val="FFFFFF"/>
                       </a:solidFill>
                       <a:prstDash val="solid"/>
                       <a:round/>
@@ -6400,7 +6110,7 @@
                     </a:lnR>
                     <a:lnT w="12700" cap="flat" cmpd="sng" algn="ctr">
                       <a:solidFill>
-                        <a:srgbClr val="0E1726"/>
+                        <a:srgbClr val="FFFFFF"/>
                       </a:solidFill>
                       <a:prstDash val="solid"/>
                       <a:round/>
@@ -6409,7 +6119,7 @@
                     </a:lnT>
                     <a:lnB w="12700" cap="flat" cmpd="sng" algn="ctr">
                       <a:solidFill>
-                        <a:srgbClr val="0E1726"/>
+                        <a:srgbClr val="FFFFFF"/>
                       </a:solidFill>
                       <a:prstDash val="solid"/>
                       <a:round/>
@@ -6417,7 +6127,7 @@
                       <a:tailEnd type="none" w="med" len="med"/>
                     </a:lnB>
                     <a:solidFill>
-                      <a:srgbClr val="18243A"/>
+                      <a:srgbClr val="F1F5F9"/>
                     </a:solidFill>
                   </a:tcPr>
                 </a:tc>
@@ -6432,7 +6142,7 @@
                       <a:r>
                         <a:rPr lang="en-US" sz="1200" dirty="0">
                           <a:solidFill>
-                            <a:srgbClr val="E6EDF3"/>
+                            <a:srgbClr val="1F2937"/>
                           </a:solidFill>
                         </a:rPr>
                         <a:t>test</a:t>
@@ -6443,7 +6153,7 @@
                   <a:tcPr marL="76200" marR="76200" marT="38100" marB="38100" anchor="ctr">
                     <a:lnL w="12700" cap="flat" cmpd="sng" algn="ctr">
                       <a:solidFill>
-                        <a:srgbClr val="0E1726"/>
+                        <a:srgbClr val="FFFFFF"/>
                       </a:solidFill>
                       <a:prstDash val="solid"/>
                       <a:round/>
@@ -6452,7 +6162,7 @@
                     </a:lnL>
                     <a:lnR w="12700" cap="flat" cmpd="sng" algn="ctr">
                       <a:solidFill>
-                        <a:srgbClr val="0E1726"/>
+                        <a:srgbClr val="FFFFFF"/>
                       </a:solidFill>
                       <a:prstDash val="solid"/>
                       <a:round/>
@@ -6461,7 +6171,7 @@
                     </a:lnR>
                     <a:lnT w="12700" cap="flat" cmpd="sng" algn="ctr">
                       <a:solidFill>
-                        <a:srgbClr val="0E1726"/>
+                        <a:srgbClr val="FFFFFF"/>
                       </a:solidFill>
                       <a:prstDash val="solid"/>
                       <a:round/>
@@ -6470,7 +6180,7 @@
                     </a:lnT>
                     <a:lnB w="12700" cap="flat" cmpd="sng" algn="ctr">
                       <a:solidFill>
-                        <a:srgbClr val="0E1726"/>
+                        <a:srgbClr val="FFFFFF"/>
                       </a:solidFill>
                       <a:prstDash val="solid"/>
                       <a:round/>
@@ -6478,7 +6188,7 @@
                       <a:tailEnd type="none" w="med" len="med"/>
                     </a:lnB>
                     <a:solidFill>
-                      <a:srgbClr val="18243A"/>
+                      <a:srgbClr val="F1F5F9"/>
                     </a:solidFill>
                   </a:tcPr>
                 </a:tc>
@@ -6514,7 +6224,7 @@
             <a:r>
               <a:rPr lang="en-US" sz="900" dirty="0">
                 <a:solidFill>
-                  <a:srgbClr val="94A3B8"/>
+                  <a:srgbClr val="64748B"/>
                 </a:solidFill>
                 <a:latin typeface="Calibri" pitchFamily="34" charset="0"/>
                 <a:ea typeface="Calibri" pitchFamily="34" charset="-122"/>
@@ -6526,38 +6236,9 @@
           </a:p>
         </p:txBody>
       </p:sp>
-      <p:sp>
-        <p:nvSpPr>
-          <p:cNvPr id="7" name="Shape 3"/>
-          <p:cNvSpPr/>
-          <p:nvPr/>
-        </p:nvSpPr>
-        <p:spPr>
-          <a:xfrm>
-            <a:off x="7772400" y="4590288"/>
-            <a:ext cx="969264" cy="475488"/>
-          </a:xfrm>
-          <a:prstGeom prst="roundRect">
-            <a:avLst>
-              <a:gd name="adj" fmla="val 11538"/>
-            </a:avLst>
-          </a:prstGeom>
-          <a:solidFill>
-            <a:srgbClr val="FFFFFF"/>
-          </a:solidFill>
-          <a:ln/>
-          <a:effectLst>
-            <a:outerShdw sx="100000" sy="100000" kx="0" ky="0" algn="bl" rotWithShape="0" blurRad="101600" dist="38100" dir="5400000">
-              <a:srgbClr val="000000">
-                <a:alpha val="35000"/>
-              </a:srgbClr>
-            </a:outerShdw>
-          </a:effectLst>
-        </p:spPr>
-      </p:sp>
       <p:pic>
         <p:nvPicPr>
-          <p:cNvPr id="8" name="Image 1" descr="/Users/pop7/Library/CloudStorage/OneDrive-MonsterConnectCo.,Ltd/Lecture/KOSEN69 - software-security/slides/pptx/assets/logo-small.png">    </p:cNvPr>
+          <p:cNvPr id="7" name="Image 1" descr="/Users/pop7/Library/CloudStorage/OneDrive-MonsterConnectCo.,Ltd/Lecture/KOSEN69 - software-security/slides/pptx/assets/logo-small.png">    </p:cNvPr>
           <p:cNvPicPr>
             <a:picLocks noChangeAspect="1"/>
           </p:cNvPicPr>
@@ -6571,7 +6252,7 @@
         </p:blipFill>
         <p:spPr>
           <a:xfrm>
-            <a:off x="7872984" y="4681728"/>
+            <a:off x="7882128" y="4700016"/>
             <a:ext cx="768096" cy="356616"/>
           </a:xfrm>
           <a:prstGeom prst="rect">
@@ -6593,7 +6274,7 @@
     <p:bg>
       <p:bgPr>
         <a:solidFill>
-          <a:srgbClr val="0E1726"/>
+          <a:srgbClr val="FFFFFF"/>
         </a:solidFill>
       </p:bgPr>
     </p:bg>
@@ -6630,9 +6311,9 @@
           </a:solidFill>
           <a:ln/>
           <a:effectLst>
-            <a:outerShdw sx="100000" sy="100000" kx="0" ky="0" algn="bl" rotWithShape="0" blurRad="101600" dist="38100" dir="5400000">
+            <a:outerShdw sx="100000" sy="100000" kx="0" ky="0" algn="bl" rotWithShape="0" blurRad="76200" dist="25400" dir="5400000">
               <a:srgbClr val="000000">
-                <a:alpha val="35000"/>
+                <a:alpha val="12000"/>
               </a:srgbClr>
             </a:outerShdw>
           </a:effectLst>
@@ -6689,7 +6370,7 @@
             <a:r>
               <a:rPr lang="en-US" sz="2600" b="1" dirty="0">
                 <a:solidFill>
-                  <a:srgbClr val="E6EDF3"/>
+                  <a:srgbClr val="1F2937"/>
                 </a:solidFill>
                 <a:latin typeface="Arial" pitchFamily="34" charset="0"/>
                 <a:ea typeface="Arial" pitchFamily="34" charset="-122"/>
@@ -6718,13 +6399,13 @@
             </a:avLst>
           </a:prstGeom>
           <a:solidFill>
-            <a:srgbClr val="18243A"/>
+            <a:srgbClr val="F1F5F9"/>
           </a:solidFill>
           <a:ln/>
           <a:effectLst>
-            <a:outerShdw sx="100000" sy="100000" kx="0" ky="0" algn="bl" rotWithShape="0" blurRad="101600" dist="38100" dir="5400000">
+            <a:outerShdw sx="100000" sy="100000" kx="0" ky="0" algn="bl" rotWithShape="0" blurRad="76200" dist="25400" dir="5400000">
               <a:srgbClr val="000000">
-                <a:alpha val="35000"/>
+                <a:alpha val="12000"/>
               </a:srgbClr>
             </a:outerShdw>
           </a:effectLst>
@@ -6761,7 +6442,7 @@
             <a:r>
               <a:rPr lang="en-US" sz="1400" dirty="0">
                 <a:solidFill>
-                  <a:srgbClr val="E6EDF3"/>
+                  <a:srgbClr val="1F2937"/>
                 </a:solidFill>
                 <a:latin typeface="Calibri" pitchFamily="34" charset="0"/>
                 <a:ea typeface="Calibri" pitchFamily="34" charset="-122"/>
@@ -6782,7 +6463,7 @@
             <a:r>
               <a:rPr lang="en-US" sz="1400" dirty="0">
                 <a:solidFill>
-                  <a:srgbClr val="E6EDF3"/>
+                  <a:srgbClr val="1F2937"/>
                 </a:solidFill>
                 <a:latin typeface="Calibri" pitchFamily="34" charset="0"/>
                 <a:ea typeface="Calibri" pitchFamily="34" charset="-122"/>
@@ -6811,7 +6492,7 @@
             </a:avLst>
           </a:prstGeom>
           <a:solidFill>
-            <a:srgbClr val="1E2B45"/>
+            <a:srgbClr val="E8EDF3"/>
           </a:solidFill>
           <a:ln/>
         </p:spPr>
@@ -6882,7 +6563,7 @@
             <a:r>
               <a:rPr lang="en-US" sz="900" dirty="0">
                 <a:solidFill>
-                  <a:srgbClr val="94A3B8"/>
+                  <a:srgbClr val="64748B"/>
                 </a:solidFill>
                 <a:latin typeface="Calibri" pitchFamily="34" charset="0"/>
                 <a:ea typeface="Calibri" pitchFamily="34" charset="-122"/>
@@ -6894,38 +6575,9 @@
           </a:p>
         </p:txBody>
       </p:sp>
-      <p:sp>
-        <p:nvSpPr>
-          <p:cNvPr id="10" name="Shape 7"/>
-          <p:cNvSpPr/>
-          <p:nvPr/>
-        </p:nvSpPr>
-        <p:spPr>
-          <a:xfrm>
-            <a:off x="7772400" y="4590288"/>
-            <a:ext cx="969264" cy="475488"/>
-          </a:xfrm>
-          <a:prstGeom prst="roundRect">
-            <a:avLst>
-              <a:gd name="adj" fmla="val 11538"/>
-            </a:avLst>
-          </a:prstGeom>
-          <a:solidFill>
-            <a:srgbClr val="FFFFFF"/>
-          </a:solidFill>
-          <a:ln/>
-          <a:effectLst>
-            <a:outerShdw sx="100000" sy="100000" kx="0" ky="0" algn="bl" rotWithShape="0" blurRad="101600" dist="38100" dir="5400000">
-              <a:srgbClr val="000000">
-                <a:alpha val="35000"/>
-              </a:srgbClr>
-            </a:outerShdw>
-          </a:effectLst>
-        </p:spPr>
-      </p:sp>
       <p:pic>
         <p:nvPicPr>
-          <p:cNvPr id="11" name="Image 1" descr="/Users/pop7/Library/CloudStorage/OneDrive-MonsterConnectCo.,Ltd/Lecture/KOSEN69 - software-security/slides/pptx/assets/logo-small.png">    </p:cNvPr>
+          <p:cNvPr id="10" name="Image 1" descr="/Users/pop7/Library/CloudStorage/OneDrive-MonsterConnectCo.,Ltd/Lecture/KOSEN69 - software-security/slides/pptx/assets/logo-small.png">    </p:cNvPr>
           <p:cNvPicPr>
             <a:picLocks noChangeAspect="1"/>
           </p:cNvPicPr>
@@ -6939,7 +6591,7 @@
         </p:blipFill>
         <p:spPr>
           <a:xfrm>
-            <a:off x="7872984" y="4681728"/>
+            <a:off x="7882128" y="4700016"/>
             <a:ext cx="768096" cy="356616"/>
           </a:xfrm>
           <a:prstGeom prst="rect">
@@ -6961,7 +6613,7 @@
     <p:bg>
       <p:bgPr>
         <a:solidFill>
-          <a:srgbClr val="0E1726"/>
+          <a:srgbClr val="FFFFFF"/>
         </a:solidFill>
       </p:bgPr>
     </p:bg>
@@ -6998,9 +6650,9 @@
           </a:solidFill>
           <a:ln/>
           <a:effectLst>
-            <a:outerShdw sx="100000" sy="100000" kx="0" ky="0" algn="bl" rotWithShape="0" blurRad="101600" dist="38100" dir="5400000">
+            <a:outerShdw sx="100000" sy="100000" kx="0" ky="0" algn="bl" rotWithShape="0" blurRad="76200" dist="25400" dir="5400000">
               <a:srgbClr val="000000">
-                <a:alpha val="35000"/>
+                <a:alpha val="12000"/>
               </a:srgbClr>
             </a:outerShdw>
           </a:effectLst>
@@ -7057,7 +6709,7 @@
             <a:r>
               <a:rPr lang="en-US" sz="2600" b="1" dirty="0">
                 <a:solidFill>
-                  <a:srgbClr val="E6EDF3"/>
+                  <a:srgbClr val="1F2937"/>
                 </a:solidFill>
                 <a:latin typeface="Arial" pitchFamily="34" charset="0"/>
                 <a:ea typeface="Arial" pitchFamily="34" charset="-122"/>
@@ -7090,7 +6742,7 @@
           </a:solidFill>
           <a:ln w="12700">
             <a:solidFill>
-              <a:srgbClr val="1E2B45"/>
+              <a:srgbClr val="E8EDF3"/>
             </a:solidFill>
             <a:prstDash val="solid"/>
           </a:ln>
@@ -7237,13 +6889,13 @@
             </a:avLst>
           </a:prstGeom>
           <a:solidFill>
-            <a:srgbClr val="18243A"/>
+            <a:srgbClr val="F1F5F9"/>
           </a:solidFill>
           <a:ln/>
           <a:effectLst>
-            <a:outerShdw sx="100000" sy="100000" kx="0" ky="0" algn="bl" rotWithShape="0" blurRad="101600" dist="38100" dir="5400000">
+            <a:outerShdw sx="100000" sy="100000" kx="0" ky="0" algn="bl" rotWithShape="0" blurRad="76200" dist="25400" dir="5400000">
               <a:srgbClr val="000000">
-                <a:alpha val="35000"/>
+                <a:alpha val="12000"/>
               </a:srgbClr>
             </a:outerShdw>
           </a:effectLst>
@@ -7280,7 +6932,7 @@
             <a:r>
               <a:rPr lang="en-US" sz="1400" dirty="0">
                 <a:solidFill>
-                  <a:srgbClr val="E6EDF3"/>
+                  <a:srgbClr val="1F2937"/>
                 </a:solidFill>
                 <a:latin typeface="Calibri" pitchFamily="34" charset="0"/>
                 <a:ea typeface="Calibri" pitchFamily="34" charset="-122"/>
@@ -7301,7 +6953,7 @@
             <a:r>
               <a:rPr lang="en-US" sz="1400" dirty="0">
                 <a:solidFill>
-                  <a:srgbClr val="E6EDF3"/>
+                  <a:srgbClr val="1F2937"/>
                 </a:solidFill>
                 <a:latin typeface="Calibri" pitchFamily="34" charset="0"/>
                 <a:ea typeface="Calibri" pitchFamily="34" charset="-122"/>
@@ -7322,7 +6974,7 @@
             <a:r>
               <a:rPr lang="en-US" sz="1400" dirty="0">
                 <a:solidFill>
-                  <a:srgbClr val="E6EDF3"/>
+                  <a:srgbClr val="1F2937"/>
                 </a:solidFill>
                 <a:latin typeface="Calibri" pitchFamily="34" charset="0"/>
                 <a:ea typeface="Calibri" pitchFamily="34" charset="-122"/>
@@ -7361,7 +7013,7 @@
             <a:r>
               <a:rPr lang="en-US" sz="900" dirty="0">
                 <a:solidFill>
-                  <a:srgbClr val="94A3B8"/>
+                  <a:srgbClr val="64748B"/>
                 </a:solidFill>
                 <a:latin typeface="Calibri" pitchFamily="34" charset="0"/>
                 <a:ea typeface="Calibri" pitchFamily="34" charset="-122"/>
@@ -7373,38 +7025,9 @@
           </a:p>
         </p:txBody>
       </p:sp>
-      <p:sp>
-        <p:nvSpPr>
-          <p:cNvPr id="10" name="Shape 7"/>
-          <p:cNvSpPr/>
-          <p:nvPr/>
-        </p:nvSpPr>
-        <p:spPr>
-          <a:xfrm>
-            <a:off x="7772400" y="4590288"/>
-            <a:ext cx="969264" cy="475488"/>
-          </a:xfrm>
-          <a:prstGeom prst="roundRect">
-            <a:avLst>
-              <a:gd name="adj" fmla="val 11538"/>
-            </a:avLst>
-          </a:prstGeom>
-          <a:solidFill>
-            <a:srgbClr val="FFFFFF"/>
-          </a:solidFill>
-          <a:ln/>
-          <a:effectLst>
-            <a:outerShdw sx="100000" sy="100000" kx="0" ky="0" algn="bl" rotWithShape="0" blurRad="101600" dist="38100" dir="5400000">
-              <a:srgbClr val="000000">
-                <a:alpha val="35000"/>
-              </a:srgbClr>
-            </a:outerShdw>
-          </a:effectLst>
-        </p:spPr>
-      </p:sp>
       <p:pic>
         <p:nvPicPr>
-          <p:cNvPr id="11" name="Image 1" descr="/Users/pop7/Library/CloudStorage/OneDrive-MonsterConnectCo.,Ltd/Lecture/KOSEN69 - software-security/slides/pptx/assets/logo-small.png">    </p:cNvPr>
+          <p:cNvPr id="10" name="Image 1" descr="/Users/pop7/Library/CloudStorage/OneDrive-MonsterConnectCo.,Ltd/Lecture/KOSEN69 - software-security/slides/pptx/assets/logo-small.png">    </p:cNvPr>
           <p:cNvPicPr>
             <a:picLocks noChangeAspect="1"/>
           </p:cNvPicPr>
@@ -7418,7 +7041,7 @@
         </p:blipFill>
         <p:spPr>
           <a:xfrm>
-            <a:off x="7872984" y="4681728"/>
+            <a:off x="7882128" y="4700016"/>
             <a:ext cx="768096" cy="356616"/>
           </a:xfrm>
           <a:prstGeom prst="rect">
@@ -7440,7 +7063,7 @@
     <p:bg>
       <p:bgPr>
         <a:solidFill>
-          <a:srgbClr val="0E1726"/>
+          <a:srgbClr val="FFFFFF"/>
         </a:solidFill>
       </p:bgPr>
     </p:bg>
@@ -7477,9 +7100,9 @@
           </a:solidFill>
           <a:ln/>
           <a:effectLst>
-            <a:outerShdw sx="100000" sy="100000" kx="0" ky="0" algn="bl" rotWithShape="0" blurRad="101600" dist="38100" dir="5400000">
+            <a:outerShdw sx="100000" sy="100000" kx="0" ky="0" algn="bl" rotWithShape="0" blurRad="76200" dist="25400" dir="5400000">
               <a:srgbClr val="000000">
-                <a:alpha val="35000"/>
+                <a:alpha val="12000"/>
               </a:srgbClr>
             </a:outerShdw>
           </a:effectLst>
@@ -7536,7 +7159,7 @@
             <a:r>
               <a:rPr lang="en-US" sz="2600" b="1" dirty="0">
                 <a:solidFill>
-                  <a:srgbClr val="E6EDF3"/>
+                  <a:srgbClr val="1F2937"/>
                 </a:solidFill>
                 <a:latin typeface="Arial" pitchFamily="34" charset="0"/>
                 <a:ea typeface="Arial" pitchFamily="34" charset="-122"/>
@@ -7565,13 +7188,13 @@
             </a:avLst>
           </a:prstGeom>
           <a:solidFill>
-            <a:srgbClr val="18243A"/>
+            <a:srgbClr val="F1F5F9"/>
           </a:solidFill>
           <a:ln/>
           <a:effectLst>
-            <a:outerShdw sx="100000" sy="100000" kx="0" ky="0" algn="bl" rotWithShape="0" blurRad="101600" dist="38100" dir="5400000">
+            <a:outerShdw sx="100000" sy="100000" kx="0" ky="0" algn="bl" rotWithShape="0" blurRad="76200" dist="25400" dir="5400000">
               <a:srgbClr val="000000">
-                <a:alpha val="35000"/>
+                <a:alpha val="12000"/>
               </a:srgbClr>
             </a:outerShdw>
           </a:effectLst>
@@ -7608,7 +7231,7 @@
             <a:r>
               <a:rPr lang="en-US" sz="1400" dirty="0">
                 <a:solidFill>
-                  <a:srgbClr val="E6EDF3"/>
+                  <a:srgbClr val="1F2937"/>
                 </a:solidFill>
                 <a:latin typeface="Calibri" pitchFamily="34" charset="0"/>
                 <a:ea typeface="Calibri" pitchFamily="34" charset="-122"/>
@@ -7629,7 +7252,7 @@
             <a:r>
               <a:rPr lang="en-US" sz="1400" dirty="0">
                 <a:solidFill>
-                  <a:srgbClr val="E6EDF3"/>
+                  <a:srgbClr val="1F2937"/>
                 </a:solidFill>
                 <a:latin typeface="Calibri" pitchFamily="34" charset="0"/>
                 <a:ea typeface="Calibri" pitchFamily="34" charset="-122"/>
@@ -7650,7 +7273,7 @@
             <a:r>
               <a:rPr lang="en-US" sz="1400" dirty="0">
                 <a:solidFill>
-                  <a:srgbClr val="E6EDF3"/>
+                  <a:srgbClr val="1F2937"/>
                 </a:solidFill>
                 <a:latin typeface="Calibri" pitchFamily="34" charset="0"/>
                 <a:ea typeface="Calibri" pitchFamily="34" charset="-122"/>
@@ -7683,7 +7306,7 @@
           </a:solidFill>
           <a:ln w="12700">
             <a:solidFill>
-              <a:srgbClr val="1E2B45"/>
+              <a:srgbClr val="E8EDF3"/>
             </a:solidFill>
             <a:prstDash val="solid"/>
           </a:ln>
@@ -7755,7 +7378,7 @@
             <a:r>
               <a:rPr lang="en-US" sz="900" dirty="0">
                 <a:solidFill>
-                  <a:srgbClr val="94A3B8"/>
+                  <a:srgbClr val="64748B"/>
                 </a:solidFill>
                 <a:latin typeface="Calibri" pitchFamily="34" charset="0"/>
                 <a:ea typeface="Calibri" pitchFamily="34" charset="-122"/>
@@ -7767,38 +7390,9 @@
           </a:p>
         </p:txBody>
       </p:sp>
-      <p:sp>
-        <p:nvSpPr>
-          <p:cNvPr id="10" name="Shape 7"/>
-          <p:cNvSpPr/>
-          <p:nvPr/>
-        </p:nvSpPr>
-        <p:spPr>
-          <a:xfrm>
-            <a:off x="7772400" y="4590288"/>
-            <a:ext cx="969264" cy="475488"/>
-          </a:xfrm>
-          <a:prstGeom prst="roundRect">
-            <a:avLst>
-              <a:gd name="adj" fmla="val 11538"/>
-            </a:avLst>
-          </a:prstGeom>
-          <a:solidFill>
-            <a:srgbClr val="FFFFFF"/>
-          </a:solidFill>
-          <a:ln/>
-          <a:effectLst>
-            <a:outerShdw sx="100000" sy="100000" kx="0" ky="0" algn="bl" rotWithShape="0" blurRad="101600" dist="38100" dir="5400000">
-              <a:srgbClr val="000000">
-                <a:alpha val="35000"/>
-              </a:srgbClr>
-            </a:outerShdw>
-          </a:effectLst>
-        </p:spPr>
-      </p:sp>
       <p:pic>
         <p:nvPicPr>
-          <p:cNvPr id="11" name="Image 1" descr="/Users/pop7/Library/CloudStorage/OneDrive-MonsterConnectCo.,Ltd/Lecture/KOSEN69 - software-security/slides/pptx/assets/logo-small.png">    </p:cNvPr>
+          <p:cNvPr id="10" name="Image 1" descr="/Users/pop7/Library/CloudStorage/OneDrive-MonsterConnectCo.,Ltd/Lecture/KOSEN69 - software-security/slides/pptx/assets/logo-small.png">    </p:cNvPr>
           <p:cNvPicPr>
             <a:picLocks noChangeAspect="1"/>
           </p:cNvPicPr>
@@ -7812,7 +7406,7 @@
         </p:blipFill>
         <p:spPr>
           <a:xfrm>
-            <a:off x="7872984" y="4681728"/>
+            <a:off x="7882128" y="4700016"/>
             <a:ext cx="768096" cy="356616"/>
           </a:xfrm>
           <a:prstGeom prst="rect">
@@ -7834,7 +7428,7 @@
     <p:bg>
       <p:bgPr>
         <a:solidFill>
-          <a:srgbClr val="0E1726"/>
+          <a:srgbClr val="FFFFFF"/>
         </a:solidFill>
       </p:bgPr>
     </p:bg>
@@ -7871,9 +7465,9 @@
           </a:solidFill>
           <a:ln/>
           <a:effectLst>
-            <a:outerShdw sx="100000" sy="100000" kx="0" ky="0" algn="bl" rotWithShape="0" blurRad="101600" dist="38100" dir="5400000">
+            <a:outerShdw sx="100000" sy="100000" kx="0" ky="0" algn="bl" rotWithShape="0" blurRad="76200" dist="25400" dir="5400000">
               <a:srgbClr val="000000">
-                <a:alpha val="35000"/>
+                <a:alpha val="12000"/>
               </a:srgbClr>
             </a:outerShdw>
           </a:effectLst>
@@ -7930,7 +7524,7 @@
             <a:r>
               <a:rPr lang="en-US" sz="2600" b="1" dirty="0">
                 <a:solidFill>
-                  <a:srgbClr val="E6EDF3"/>
+                  <a:srgbClr val="1F2937"/>
                 </a:solidFill>
                 <a:latin typeface="Arial" pitchFamily="34" charset="0"/>
                 <a:ea typeface="Arial" pitchFamily="34" charset="-122"/>
@@ -7959,13 +7553,13 @@
             </a:avLst>
           </a:prstGeom>
           <a:solidFill>
-            <a:srgbClr val="18243A"/>
+            <a:srgbClr val="F1F5F9"/>
           </a:solidFill>
           <a:ln/>
           <a:effectLst>
-            <a:outerShdw sx="100000" sy="100000" kx="0" ky="0" algn="bl" rotWithShape="0" blurRad="101600" dist="38100" dir="5400000">
+            <a:outerShdw sx="100000" sy="100000" kx="0" ky="0" algn="bl" rotWithShape="0" blurRad="76200" dist="25400" dir="5400000">
               <a:srgbClr val="000000">
-                <a:alpha val="35000"/>
+                <a:alpha val="12000"/>
               </a:srgbClr>
             </a:outerShdw>
           </a:effectLst>
@@ -8002,7 +7596,7 @@
             <a:r>
               <a:rPr lang="en-US" sz="1400" dirty="0">
                 <a:solidFill>
-                  <a:srgbClr val="E6EDF3"/>
+                  <a:srgbClr val="1F2937"/>
                 </a:solidFill>
                 <a:latin typeface="Calibri" pitchFamily="34" charset="0"/>
                 <a:ea typeface="Calibri" pitchFamily="34" charset="-122"/>
@@ -8023,7 +7617,7 @@
             <a:r>
               <a:rPr lang="en-US" sz="1400" dirty="0">
                 <a:solidFill>
-                  <a:srgbClr val="E6EDF3"/>
+                  <a:srgbClr val="1F2937"/>
                 </a:solidFill>
                 <a:latin typeface="Calibri" pitchFamily="34" charset="0"/>
                 <a:ea typeface="Calibri" pitchFamily="34" charset="-122"/>
@@ -8044,7 +7638,7 @@
             <a:r>
               <a:rPr lang="en-US" sz="1400" dirty="0">
                 <a:solidFill>
-                  <a:srgbClr val="E6EDF3"/>
+                  <a:srgbClr val="1F2937"/>
                 </a:solidFill>
                 <a:latin typeface="Calibri" pitchFamily="34" charset="0"/>
                 <a:ea typeface="Calibri" pitchFamily="34" charset="-122"/>
@@ -8065,7 +7659,7 @@
             <a:r>
               <a:rPr lang="en-US" sz="1400" dirty="0">
                 <a:solidFill>
-                  <a:srgbClr val="E6EDF3"/>
+                  <a:srgbClr val="1F2937"/>
                 </a:solidFill>
                 <a:latin typeface="Calibri" pitchFamily="34" charset="0"/>
                 <a:ea typeface="Calibri" pitchFamily="34" charset="-122"/>
@@ -8104,7 +7698,7 @@
             <a:r>
               <a:rPr lang="en-US" sz="900" dirty="0">
                 <a:solidFill>
-                  <a:srgbClr val="94A3B8"/>
+                  <a:srgbClr val="64748B"/>
                 </a:solidFill>
                 <a:latin typeface="Calibri" pitchFamily="34" charset="0"/>
                 <a:ea typeface="Calibri" pitchFamily="34" charset="-122"/>
@@ -8116,38 +7710,9 @@
           </a:p>
         </p:txBody>
       </p:sp>
-      <p:sp>
-        <p:nvSpPr>
-          <p:cNvPr id="8" name="Shape 5"/>
-          <p:cNvSpPr/>
-          <p:nvPr/>
-        </p:nvSpPr>
-        <p:spPr>
-          <a:xfrm>
-            <a:off x="7772400" y="4590288"/>
-            <a:ext cx="969264" cy="475488"/>
-          </a:xfrm>
-          <a:prstGeom prst="roundRect">
-            <a:avLst>
-              <a:gd name="adj" fmla="val 11538"/>
-            </a:avLst>
-          </a:prstGeom>
-          <a:solidFill>
-            <a:srgbClr val="FFFFFF"/>
-          </a:solidFill>
-          <a:ln/>
-          <a:effectLst>
-            <a:outerShdw sx="100000" sy="100000" kx="0" ky="0" algn="bl" rotWithShape="0" blurRad="101600" dist="38100" dir="5400000">
-              <a:srgbClr val="000000">
-                <a:alpha val="35000"/>
-              </a:srgbClr>
-            </a:outerShdw>
-          </a:effectLst>
-        </p:spPr>
-      </p:sp>
       <p:pic>
         <p:nvPicPr>
-          <p:cNvPr id="9" name="Image 1" descr="/Users/pop7/Library/CloudStorage/OneDrive-MonsterConnectCo.,Ltd/Lecture/KOSEN69 - software-security/slides/pptx/assets/logo-small.png">    </p:cNvPr>
+          <p:cNvPr id="8" name="Image 1" descr="/Users/pop7/Library/CloudStorage/OneDrive-MonsterConnectCo.,Ltd/Lecture/KOSEN69 - software-security/slides/pptx/assets/logo-small.png">    </p:cNvPr>
           <p:cNvPicPr>
             <a:picLocks noChangeAspect="1"/>
           </p:cNvPicPr>
@@ -8161,7 +7726,7 @@
         </p:blipFill>
         <p:spPr>
           <a:xfrm>
-            <a:off x="7872984" y="4681728"/>
+            <a:off x="7882128" y="4700016"/>
             <a:ext cx="768096" cy="356616"/>
           </a:xfrm>
           <a:prstGeom prst="rect">

--- a/slides/pptx/week02.pptx
+++ b/slides/pptx/week02.pptx
@@ -3355,6 +3355,67 @@
         <p:spPr>
           <a:xfrm>
             <a:off x="457200" y="1325880"/>
+            <a:ext cx="8229600" cy="822960"/>
+          </a:xfrm>
+          <a:prstGeom prst="roundRect">
+            <a:avLst>
+              <a:gd name="adj" fmla="val 8889"/>
+            </a:avLst>
+          </a:prstGeom>
+          <a:solidFill>
+            <a:srgbClr val="E8EDF3"/>
+          </a:solidFill>
+          <a:ln/>
+        </p:spPr>
+      </p:sp>
+      <p:sp>
+        <p:nvSpPr>
+          <p:cNvPr id="6" name="Text 3"/>
+          <p:cNvSpPr/>
+          <p:nvPr/>
+        </p:nvSpPr>
+        <p:spPr>
+          <a:xfrm>
+            <a:off x="731520" y="1325880"/>
+            <a:ext cx="7680960" cy="822960"/>
+          </a:xfrm>
+          <a:prstGeom prst="rect">
+            <a:avLst/>
+          </a:prstGeom>
+          <a:noFill/>
+          <a:ln/>
+        </p:spPr>
+        <p:txBody>
+          <a:bodyPr wrap="square" lIns="0" tIns="0" rIns="0" bIns="0" rtlCol="0" anchor="ctr"/>
+          <a:lstStyle/>
+          <a:p>
+            <a:pPr indent="0" marL="0">
+              <a:buNone/>
+            </a:pPr>
+            <a:r>
+              <a:rPr lang="en-US" sz="1400" i="1" dirty="0">
+                <a:solidFill>
+                  <a:srgbClr val="E35205"/>
+                </a:solidFill>
+                <a:latin typeface="Calibri" pitchFamily="34" charset="0"/>
+                <a:ea typeface="Calibri" pitchFamily="34" charset="-122"/>
+                <a:cs typeface="Calibri" pitchFamily="34" charset="-120"/>
+              </a:rPr>
+              <a:t>📋 Worksheet 2 — labs/week02-sdlc-tooling/worksheet.md (Part 3) · kickoff: bash scan.sh (Semgrep + Gitleaks on ./vulnerable-repo)</a:t>
+            </a:r>
+            <a:endParaRPr lang="en-US" sz="1400" dirty="0"/>
+          </a:p>
+        </p:txBody>
+      </p:sp>
+      <p:sp>
+        <p:nvSpPr>
+          <p:cNvPr id="7" name="Shape 4"/>
+          <p:cNvSpPr/>
+          <p:nvPr/>
+        </p:nvSpPr>
+        <p:spPr>
+          <a:xfrm>
+            <a:off x="457200" y="2313432"/>
             <a:ext cx="8229600" cy="1517904"/>
           </a:xfrm>
           <a:prstGeom prst="roundRect">
@@ -3377,13 +3438,13 @@
       </p:sp>
       <p:sp>
         <p:nvSpPr>
-          <p:cNvPr id="6" name="Text 3"/>
+          <p:cNvPr id="8" name="Text 5"/>
           <p:cNvSpPr/>
           <p:nvPr/>
         </p:nvSpPr>
         <p:spPr>
           <a:xfrm>
-            <a:off x="731520" y="1435608"/>
+            <a:off x="731520" y="2423160"/>
             <a:ext cx="7680960" cy="1298448"/>
           </a:xfrm>
           <a:prstGeom prst="rect">
@@ -3483,7 +3544,7 @@
       </p:sp>
       <p:sp>
         <p:nvSpPr>
-          <p:cNvPr id="7" name="Text 4"/>
+          <p:cNvPr id="9" name="Text 6"/>
           <p:cNvSpPr/>
           <p:nvPr/>
         </p:nvSpPr>
@@ -3522,7 +3583,7 @@
       </p:sp>
       <p:pic>
         <p:nvPicPr>
-          <p:cNvPr id="8" name="Image 1" descr="/Users/pop7/Library/CloudStorage/OneDrive-MonsterConnectCo.,Ltd/Lecture/KOSEN69 - software-security/slides/pptx/assets/logo-small.png">    </p:cNvPr>
+          <p:cNvPr id="10" name="Image 1" descr="/Users/pop7/Library/CloudStorage/OneDrive-MonsterConnectCo.,Ltd/Lecture/KOSEN69 - software-security/slides/pptx/assets/logo-small.png">    </p:cNvPr>
           <p:cNvPicPr>
             <a:picLocks noChangeAspect="1"/>
           </p:cNvPicPr>
